--- a/06_render/out/deck_vitamin_c.pptx
+++ b/06_render/out/deck_vitamin_c.pptx
@@ -4851,7 +4851,7 @@
                 </a:solidFill>
                 <a:latin typeface="Arimo"/>
               </a:rPr>
-              <a:t>Безопасность и Переносимость</a:t>
+              <a:t>Местная Переносимость</a:t>
             </a:r>
           </a:p>
         </p:txBody>
@@ -4896,7 +4896,7 @@
                 </a:solidFill>
                 <a:latin typeface="Arimo"/>
               </a:rPr>
-              <a:t>Особенности применения кислых и стабильных форм витамина C</a:t>
+              <a:t>Особенности влияния уровня pH формулы на чувствительность кожи</a:t>
             </a:r>
           </a:p>
         </p:txBody>
@@ -5031,7 +5031,7 @@
                 </a:solidFill>
                 <a:latin typeface="Arimo"/>
               </a:rPr>
-              <a:t>Переносимость и безопасность в период беременности и лактации</a:t>
+              <a:t>Местное раздражение и водородный показатель (pH)</a:t>
             </a:r>
           </a:p>
         </p:txBody>
@@ -5076,7 +5076,7 @@
                 </a:solidFill>
                 <a:latin typeface="Arimo"/>
               </a:rPr>
-              <a:t>Топические средства с витамином C и SAP разрешены во время беременности и лактации. Кислые формы L-аскорбиновой кислоты (pH &lt; 3.5) могут провоцировать временное локальное раздражение.</a:t>
+              <a:t>Формулы L-аскорбиновой кислоты с низким pH (менее 3.5) могут вызывать локальное покалывание. Дериват аскорбилфосфат натрия (5% SAP) наносится при нейтральном pH и имеет комфортный профиль.</a:t>
             </a:r>
           </a:p>
         </p:txBody>
@@ -5442,7 +5442,7 @@
                 </a:solidFill>
                 <a:latin typeface="Arimo"/>
               </a:rPr>
-              <a:t>• Аскорбилфосфат Натрия (5% SAP) является стабильным и безопасным выбором в терапии акне.</a:t>
+              <a:t>• Аскорбилфосфат Натрия (5% SAP) является стабильным и эффективным средством в терапии акне.</a:t>
             </a:r>
           </a:p>
         </p:txBody>

--- a/06_render/out/deck_vitamin_c.pptx
+++ b/06_render/out/deck_vitamin_c.pptx
@@ -3220,7 +3220,7 @@
               </a:lnSpc>
               <a:defRPr sz="3600" b="1" i="0">
                 <a:solidFill>
-                  <a:srgbClr val="2C3440"/>
+                  <a:srgbClr val="1D291C"/>
                 </a:solidFill>
                 <a:latin typeface="Arimo"/>
               </a:defRPr>
@@ -3228,7 +3228,7 @@
             <a:r>
               <a:rPr sz="3600" b="1" i="0">
                 <a:solidFill>
-                  <a:srgbClr val="2C3440"/>
+                  <a:srgbClr val="1D291C"/>
                 </a:solidFill>
                 <a:latin typeface="Arimo"/>
               </a:rPr>
@@ -3338,7 +3338,7 @@
                 </a:solidFill>
                 <a:latin typeface="Arimo"/>
               </a:rPr>
-              <a:t>Применение Витамина C в дерматологии</a:t>
+              <a:t>[Placeholder] Применение Витамина C в дерматологии</a:t>
             </a:r>
           </a:p>
         </p:txBody>
@@ -3487,7 +3487,7 @@
               </a:lnSpc>
               <a:defRPr sz="3600" b="1" i="0">
                 <a:solidFill>
-                  <a:srgbClr val="2C3440"/>
+                  <a:srgbClr val="1D291C"/>
                 </a:solidFill>
                 <a:latin typeface="Arimo"/>
               </a:defRPr>
@@ -3495,7 +3495,7 @@
             <a:r>
               <a:rPr sz="3600" b="1" i="0">
                 <a:solidFill>
-                  <a:srgbClr val="2C3440"/>
+                  <a:srgbClr val="1D291C"/>
                 </a:solidFill>
                 <a:latin typeface="Arimo"/>
               </a:rPr>
@@ -3693,7 +3693,7 @@
               </a:lnSpc>
               <a:defRPr sz="2600" b="1" i="0">
                 <a:solidFill>
-                  <a:srgbClr val="2C3440"/>
+                  <a:srgbClr val="1D291C"/>
                 </a:solidFill>
                 <a:latin typeface="Arimo"/>
               </a:defRPr>
@@ -3701,7 +3701,7 @@
             <a:r>
               <a:rPr sz="2600" b="1" i="0">
                 <a:solidFill>
-                  <a:srgbClr val="2C3440"/>
+                  <a:srgbClr val="1D291C"/>
                 </a:solidFill>
                 <a:latin typeface="Arimo"/>
               </a:rPr>
@@ -3926,7 +3926,7 @@
                 </a:solidFill>
                 <a:latin typeface="Arimo"/>
               </a:rPr>
-              <a:t>Схема регуляции синтеза коллагена</a:t>
+              <a:t>[Placeholder] Схема регуляции синтеза коллагена</a:t>
             </a:r>
           </a:p>
         </p:txBody>
@@ -4075,7 +4075,7 @@
               </a:lnSpc>
               <a:defRPr sz="2600" b="1" i="0">
                 <a:solidFill>
-                  <a:srgbClr val="2C3440"/>
+                  <a:srgbClr val="1D291C"/>
                 </a:solidFill>
                 <a:latin typeface="Arimo"/>
               </a:defRPr>
@@ -4083,7 +4083,7 @@
             <a:r>
               <a:rPr sz="2600" b="1" i="0">
                 <a:solidFill>
-                  <a:srgbClr val="2C3440"/>
+                  <a:srgbClr val="1D291C"/>
                 </a:solidFill>
                 <a:latin typeface="Arimo"/>
               </a:rPr>
@@ -4252,67 +4252,30 @@
           </a:p>
         </p:txBody>
       </p:sp>
-      <p:sp>
-        <p:nvSpPr>
-          <p:cNvPr id="7" name="Rounded Rectangle 6"/>
-          <p:cNvSpPr/>
+      <p:pic>
+        <p:nvPicPr>
+          <p:cNvPr id="7" name="Picture 6" descr="ascorbic_acid.png"/>
+          <p:cNvPicPr>
+            <a:picLocks noChangeAspect="1"/>
+          </p:cNvPicPr>
           <p:nvPr/>
-        </p:nvSpPr>
+        </p:nvPicPr>
+        <p:blipFill>
+          <a:blip r:embed="rId2"/>
+          <a:stretch>
+            <a:fillRect/>
+          </a:stretch>
+        </p:blipFill>
         <p:spPr>
           <a:xfrm>
             <a:off x="5179218" y="1339453"/>
             <a:ext cx="3607593" cy="2857500"/>
           </a:xfrm>
-          <a:prstGeom prst="roundRect">
+          <a:prstGeom prst="rect">
             <a:avLst/>
           </a:prstGeom>
-          <a:solidFill>
-            <a:srgbClr val="D7E0CE"/>
-          </a:solidFill>
-          <a:ln w="12700">
-            <a:solidFill>
-              <a:srgbClr val="D7E0CE"/>
-            </a:solidFill>
-          </a:ln>
-        </p:spPr>
-        <p:style>
-          <a:lnRef idx="1">
-            <a:schemeClr val="accent1"/>
-          </a:lnRef>
-          <a:fillRef idx="3">
-            <a:schemeClr val="accent1"/>
-          </a:fillRef>
-          <a:effectRef idx="2">
-            <a:schemeClr val="accent1"/>
-          </a:effectRef>
-          <a:fontRef idx="minor">
-            <a:schemeClr val="lt1"/>
-          </a:fontRef>
-        </p:style>
-        <p:txBody>
-          <a:bodyPr rtlCol="0" anchor="ctr" wrap="square"/>
-          <a:lstStyle/>
-          <a:p>
-            <a:pPr algn="ctr">
-              <a:defRPr sz="1300" b="1">
-                <a:solidFill>
-                  <a:srgbClr val="6D8470"/>
-                </a:solidFill>
-                <a:latin typeface="Arimo"/>
-              </a:defRPr>
-            </a:pPr>
-            <a:r>
-              <a:rPr sz="1300" b="1">
-                <a:solidFill>
-                  <a:srgbClr val="6D8470"/>
-                </a:solidFill>
-                <a:latin typeface="Arimo"/>
-              </a:rPr>
-              <a:t>Зависимость всасывания от pH и концентрации</a:t>
-            </a:r>
-          </a:p>
-        </p:txBody>
-      </p:sp>
+        </p:spPr>
+      </p:pic>
     </p:spTree>
   </p:cSld>
   <p:clrMapOvr>
@@ -4457,7 +4420,7 @@
               </a:lnSpc>
               <a:defRPr sz="2600" b="1" i="0">
                 <a:solidFill>
-                  <a:srgbClr val="2C3440"/>
+                  <a:srgbClr val="1D291C"/>
                 </a:solidFill>
                 <a:latin typeface="Arimo"/>
               </a:defRPr>
@@ -4465,7 +4428,7 @@
             <a:r>
               <a:rPr sz="2600" b="1" i="0">
                 <a:solidFill>
-                  <a:srgbClr val="2C3440"/>
+                  <a:srgbClr val="1D291C"/>
                 </a:solidFill>
                 <a:latin typeface="Arimo"/>
               </a:rPr>
@@ -4634,67 +4597,30 @@
           </a:p>
         </p:txBody>
       </p:sp>
-      <p:sp>
-        <p:nvSpPr>
-          <p:cNvPr id="7" name="Rounded Rectangle 6"/>
-          <p:cNvSpPr/>
+      <p:pic>
+        <p:nvPicPr>
+          <p:cNvPr id="7" name="Picture 6" descr="sodium_ascorbyl_phosphate.png"/>
+          <p:cNvPicPr>
+            <a:picLocks noChangeAspect="1"/>
+          </p:cNvPicPr>
           <p:nvPr/>
-        </p:nvSpPr>
+        </p:nvPicPr>
+        <p:blipFill>
+          <a:blip r:embed="rId2"/>
+          <a:stretch>
+            <a:fillRect/>
+          </a:stretch>
+        </p:blipFill>
         <p:spPr>
           <a:xfrm>
             <a:off x="5179218" y="1339453"/>
             <a:ext cx="3607593" cy="2857500"/>
           </a:xfrm>
-          <a:prstGeom prst="roundRect">
+          <a:prstGeom prst="rect">
             <a:avLst/>
           </a:prstGeom>
-          <a:solidFill>
-            <a:srgbClr val="D7E0CE"/>
-          </a:solidFill>
-          <a:ln w="12700">
-            <a:solidFill>
-              <a:srgbClr val="D7E0CE"/>
-            </a:solidFill>
-          </a:ln>
-        </p:spPr>
-        <p:style>
-          <a:lnRef idx="1">
-            <a:schemeClr val="accent1"/>
-          </a:lnRef>
-          <a:fillRef idx="3">
-            <a:schemeClr val="accent1"/>
-          </a:fillRef>
-          <a:effectRef idx="2">
-            <a:schemeClr val="accent1"/>
-          </a:effectRef>
-          <a:fontRef idx="minor">
-            <a:schemeClr val="lt1"/>
-          </a:fontRef>
-        </p:style>
-        <p:txBody>
-          <a:bodyPr rtlCol="0" anchor="ctr" wrap="square"/>
-          <a:lstStyle/>
-          <a:p>
-            <a:pPr algn="ctr">
-              <a:defRPr sz="1300" b="1">
-                <a:solidFill>
-                  <a:srgbClr val="6D8470"/>
-                </a:solidFill>
-                <a:latin typeface="Arimo"/>
-              </a:defRPr>
-            </a:pPr>
-            <a:r>
-              <a:rPr sz="1300" b="1">
-                <a:solidFill>
-                  <a:srgbClr val="6D8470"/>
-                </a:solidFill>
-                <a:latin typeface="Arimo"/>
-              </a:rPr>
-              <a:t>Механизм действия SAP при акне</a:t>
-            </a:r>
-          </a:p>
-        </p:txBody>
-      </p:sp>
+        </p:spPr>
+      </p:pic>
     </p:spTree>
   </p:cSld>
   <p:clrMapOvr>
@@ -4839,7 +4765,7 @@
               </a:lnSpc>
               <a:defRPr sz="2600" b="1" i="0">
                 <a:solidFill>
-                  <a:srgbClr val="2C3440"/>
+                  <a:srgbClr val="1D291C"/>
                 </a:solidFill>
                 <a:latin typeface="Arimo"/>
               </a:defRPr>
@@ -4847,7 +4773,7 @@
             <a:r>
               <a:rPr sz="2600" b="1" i="0">
                 <a:solidFill>
-                  <a:srgbClr val="2C3440"/>
+                  <a:srgbClr val="1D291C"/>
                 </a:solidFill>
                 <a:latin typeface="Arimo"/>
               </a:rPr>
@@ -5225,7 +5151,7 @@
               </a:lnSpc>
               <a:defRPr sz="2600" b="1" i="0">
                 <a:solidFill>
-                  <a:srgbClr val="2C3440"/>
+                  <a:srgbClr val="1D291C"/>
                 </a:solidFill>
                 <a:latin typeface="Arimo"/>
               </a:defRPr>
@@ -5233,7 +5159,7 @@
             <a:r>
               <a:rPr sz="2600" b="1" i="0">
                 <a:solidFill>
-                  <a:srgbClr val="2C3440"/>
+                  <a:srgbClr val="1D291C"/>
                 </a:solidFill>
                 <a:latin typeface="Arimo"/>
               </a:rPr>

--- a/06_render/out/deck_vitamin_c.pptx
+++ b/06_render/out/deck_vitamin_c.pptx
@@ -3220,7 +3220,7 @@
               </a:lnSpc>
               <a:defRPr sz="3600" b="1" i="0">
                 <a:solidFill>
-                  <a:srgbClr val="1D291C"/>
+                  <a:srgbClr val="2C3440"/>
                 </a:solidFill>
                 <a:latin typeface="Arimo"/>
               </a:defRPr>
@@ -3228,7 +3228,7 @@
             <a:r>
               <a:rPr sz="3600" b="1" i="0">
                 <a:solidFill>
-                  <a:srgbClr val="1D291C"/>
+                  <a:srgbClr val="2C3440"/>
                 </a:solidFill>
                 <a:latin typeface="Arimo"/>
               </a:rPr>
@@ -3487,7 +3487,7 @@
               </a:lnSpc>
               <a:defRPr sz="3600" b="1" i="0">
                 <a:solidFill>
-                  <a:srgbClr val="1D291C"/>
+                  <a:srgbClr val="2C3440"/>
                 </a:solidFill>
                 <a:latin typeface="Arimo"/>
               </a:defRPr>
@@ -3495,7 +3495,7 @@
             <a:r>
               <a:rPr sz="3600" b="1" i="0">
                 <a:solidFill>
-                  <a:srgbClr val="1D291C"/>
+                  <a:srgbClr val="2C3440"/>
                 </a:solidFill>
                 <a:latin typeface="Arimo"/>
               </a:rPr>
@@ -3615,7 +3615,7 @@
                 </a:solidFill>
                 <a:latin typeface="Arimo"/>
               </a:rPr>
-              <a:t>ТОЛЬКО ДЛЯ ПРАКТИКУЮЩИХ СПЕЦИАЛИСТОВ</a:t>
+              <a:t>ТОЛЬКО ДЛЯ ПРАКТИКУЮЩИХ СПЕЦИАЛИСТОВ | SERVIER MEDICAL ART BY LES LABORATOIRES SERVIER (CC-BY 4.0)</a:t>
             </a:r>
           </a:p>
         </p:txBody>
@@ -3693,7 +3693,7 @@
               </a:lnSpc>
               <a:defRPr sz="2600" b="1" i="0">
                 <a:solidFill>
-                  <a:srgbClr val="1D291C"/>
+                  <a:srgbClr val="2C3440"/>
                 </a:solidFill>
                 <a:latin typeface="Arimo"/>
               </a:defRPr>
@@ -3701,7 +3701,7 @@
             <a:r>
               <a:rPr sz="2600" b="1" i="0">
                 <a:solidFill>
-                  <a:srgbClr val="1D291C"/>
+                  <a:srgbClr val="2C3440"/>
                 </a:solidFill>
                 <a:latin typeface="Arimo"/>
               </a:rPr>
@@ -3870,67 +3870,30 @@
           </a:p>
         </p:txBody>
       </p:sp>
-      <p:sp>
-        <p:nvSpPr>
-          <p:cNvPr id="7" name="Rounded Rectangle 6"/>
-          <p:cNvSpPr/>
+      <p:pic>
+        <p:nvPicPr>
+          <p:cNvPr id="7" name="Picture 6" descr="collagen_synthesis.png"/>
+          <p:cNvPicPr>
+            <a:picLocks noChangeAspect="1"/>
+          </p:cNvPicPr>
           <p:nvPr/>
-        </p:nvSpPr>
+        </p:nvPicPr>
+        <p:blipFill>
+          <a:blip r:embed="rId2"/>
+          <a:stretch>
+            <a:fillRect/>
+          </a:stretch>
+        </p:blipFill>
         <p:spPr>
           <a:xfrm>
             <a:off x="5179218" y="1339453"/>
             <a:ext cx="3607593" cy="2857500"/>
           </a:xfrm>
-          <a:prstGeom prst="roundRect">
+          <a:prstGeom prst="rect">
             <a:avLst/>
           </a:prstGeom>
-          <a:solidFill>
-            <a:srgbClr val="D7E0CE"/>
-          </a:solidFill>
-          <a:ln w="12700">
-            <a:solidFill>
-              <a:srgbClr val="D7E0CE"/>
-            </a:solidFill>
-          </a:ln>
-        </p:spPr>
-        <p:style>
-          <a:lnRef idx="1">
-            <a:schemeClr val="accent1"/>
-          </a:lnRef>
-          <a:fillRef idx="3">
-            <a:schemeClr val="accent1"/>
-          </a:fillRef>
-          <a:effectRef idx="2">
-            <a:schemeClr val="accent1"/>
-          </a:effectRef>
-          <a:fontRef idx="minor">
-            <a:schemeClr val="lt1"/>
-          </a:fontRef>
-        </p:style>
-        <p:txBody>
-          <a:bodyPr rtlCol="0" anchor="ctr" wrap="square"/>
-          <a:lstStyle/>
-          <a:p>
-            <a:pPr algn="ctr">
-              <a:defRPr sz="1300" b="1">
-                <a:solidFill>
-                  <a:srgbClr val="6D8470"/>
-                </a:solidFill>
-                <a:latin typeface="Arimo"/>
-              </a:defRPr>
-            </a:pPr>
-            <a:r>
-              <a:rPr sz="1300" b="1">
-                <a:solidFill>
-                  <a:srgbClr val="6D8470"/>
-                </a:solidFill>
-                <a:latin typeface="Arimo"/>
-              </a:rPr>
-              <a:t>[Placeholder] Схема регуляции синтеза коллагена</a:t>
-            </a:r>
-          </a:p>
-        </p:txBody>
-      </p:sp>
+        </p:spPr>
+      </p:pic>
     </p:spTree>
   </p:cSld>
   <p:clrMapOvr>
@@ -4075,7 +4038,7 @@
               </a:lnSpc>
               <a:defRPr sz="2600" b="1" i="0">
                 <a:solidFill>
-                  <a:srgbClr val="1D291C"/>
+                  <a:srgbClr val="2C3440"/>
                 </a:solidFill>
                 <a:latin typeface="Arimo"/>
               </a:defRPr>
@@ -4083,7 +4046,7 @@
             <a:r>
               <a:rPr sz="2600" b="1" i="0">
                 <a:solidFill>
-                  <a:srgbClr val="1D291C"/>
+                  <a:srgbClr val="2C3440"/>
                 </a:solidFill>
                 <a:latin typeface="Arimo"/>
               </a:rPr>
@@ -4254,7 +4217,7 @@
       </p:sp>
       <p:pic>
         <p:nvPicPr>
-          <p:cNvPr id="7" name="Picture 6" descr="ascorbic_acid.png"/>
+          <p:cNvPr id="7" name="Picture 6" descr="ascorbic_acid_absorption.png"/>
           <p:cNvPicPr>
             <a:picLocks noChangeAspect="1"/>
           </p:cNvPicPr>
@@ -4420,7 +4383,7 @@
               </a:lnSpc>
               <a:defRPr sz="2600" b="1" i="0">
                 <a:solidFill>
-                  <a:srgbClr val="1D291C"/>
+                  <a:srgbClr val="2C3440"/>
                 </a:solidFill>
                 <a:latin typeface="Arimo"/>
               </a:defRPr>
@@ -4428,7 +4391,7 @@
             <a:r>
               <a:rPr sz="2600" b="1" i="0">
                 <a:solidFill>
-                  <a:srgbClr val="1D291C"/>
+                  <a:srgbClr val="2C3440"/>
                 </a:solidFill>
                 <a:latin typeface="Arimo"/>
               </a:rPr>
@@ -4765,7 +4728,7 @@
               </a:lnSpc>
               <a:defRPr sz="2600" b="1" i="0">
                 <a:solidFill>
-                  <a:srgbClr val="1D291C"/>
+                  <a:srgbClr val="2C3440"/>
                 </a:solidFill>
                 <a:latin typeface="Arimo"/>
               </a:defRPr>
@@ -4773,7 +4736,7 @@
             <a:r>
               <a:rPr sz="2600" b="1" i="0">
                 <a:solidFill>
-                  <a:srgbClr val="1D291C"/>
+                  <a:srgbClr val="2C3440"/>
                 </a:solidFill>
                 <a:latin typeface="Arimo"/>
               </a:rPr>
@@ -5151,7 +5114,7 @@
               </a:lnSpc>
               <a:defRPr sz="2600" b="1" i="0">
                 <a:solidFill>
-                  <a:srgbClr val="1D291C"/>
+                  <a:srgbClr val="2C3440"/>
                 </a:solidFill>
                 <a:latin typeface="Arimo"/>
               </a:defRPr>
@@ -5159,7 +5122,7 @@
             <a:r>
               <a:rPr sz="2600" b="1" i="0">
                 <a:solidFill>
-                  <a:srgbClr val="1D291C"/>
+                  <a:srgbClr val="2C3440"/>
                 </a:solidFill>
                 <a:latin typeface="Arimo"/>
               </a:rPr>

--- a/06_render/out/deck_vitamin_c.pptx
+++ b/06_render/out/deck_vitamin_c.pptx
@@ -3147,9 +3147,33 @@
           </a:p>
         </p:txBody>
       </p:sp>
-      <p:sp>
-        <p:nvSpPr>
-          <p:cNvPr id="3" name="TextBox 2"/>
+      <p:pic>
+        <p:nvPicPr>
+          <p:cNvPr id="3" name="Picture 2" descr="descriptor_2C3440.png"/>
+          <p:cNvPicPr>
+            <a:picLocks noChangeAspect="1"/>
+          </p:cNvPicPr>
+          <p:nvPr/>
+        </p:nvPicPr>
+        <p:blipFill>
+          <a:blip r:embed="rId2"/>
+          <a:stretch>
+            <a:fillRect/>
+          </a:stretch>
+        </p:blipFill>
+        <p:spPr>
+          <a:xfrm>
+            <a:off x="357187" y="3661171"/>
+            <a:ext cx="3107531" cy="776882"/>
+          </a:xfrm>
+          <a:prstGeom prst="rect">
+            <a:avLst/>
+          </a:prstGeom>
+        </p:spPr>
+      </p:pic>
+      <p:sp>
+        <p:nvSpPr>
+          <p:cNvPr id="4" name="TextBox 3"/>
           <p:cNvSpPr txBox="1"/>
           <p:nvPr/>
         </p:nvSpPr>
@@ -3194,7 +3218,7 @@
       </p:sp>
       <p:sp>
         <p:nvSpPr>
-          <p:cNvPr id="4" name="TextBox 3"/>
+          <p:cNvPr id="5" name="TextBox 4"/>
           <p:cNvSpPr txBox="1"/>
           <p:nvPr/>
         </p:nvSpPr>
@@ -3239,7 +3263,7 @@
       </p:sp>
       <p:sp>
         <p:nvSpPr>
-          <p:cNvPr id="5" name="TextBox 4"/>
+          <p:cNvPr id="6" name="TextBox 5"/>
           <p:cNvSpPr txBox="1"/>
           <p:nvPr/>
         </p:nvSpPr>
@@ -3284,7 +3308,7 @@
       </p:sp>
       <p:sp>
         <p:nvSpPr>
-          <p:cNvPr id="6" name="Rounded Rectangle 5"/>
+          <p:cNvPr id="7" name="Rounded Rectangle 6"/>
           <p:cNvSpPr/>
           <p:nvPr/>
         </p:nvSpPr>
@@ -3414,9 +3438,33 @@
           </a:p>
         </p:txBody>
       </p:sp>
-      <p:sp>
-        <p:nvSpPr>
-          <p:cNvPr id="3" name="TextBox 2"/>
+      <p:pic>
+        <p:nvPicPr>
+          <p:cNvPr id="3" name="Picture 2" descr="horizontal_2C3440.png"/>
+          <p:cNvPicPr>
+            <a:picLocks noChangeAspect="1"/>
+          </p:cNvPicPr>
+          <p:nvPr/>
+        </p:nvPicPr>
+        <p:blipFill>
+          <a:blip r:embed="rId2"/>
+          <a:stretch>
+            <a:fillRect/>
+          </a:stretch>
+        </p:blipFill>
+        <p:spPr>
+          <a:xfrm>
+            <a:off x="357187" y="982265"/>
+            <a:ext cx="2009179" cy="482203"/>
+          </a:xfrm>
+          <a:prstGeom prst="rect">
+            <a:avLst/>
+          </a:prstGeom>
+        </p:spPr>
+      </p:pic>
+      <p:sp>
+        <p:nvSpPr>
+          <p:cNvPr id="4" name="TextBox 3"/>
           <p:cNvSpPr txBox="1"/>
           <p:nvPr/>
         </p:nvSpPr>
@@ -3461,7 +3509,7 @@
       </p:sp>
       <p:sp>
         <p:nvSpPr>
-          <p:cNvPr id="4" name="TextBox 3"/>
+          <p:cNvPr id="5" name="TextBox 4"/>
           <p:cNvSpPr txBox="1"/>
           <p:nvPr/>
         </p:nvSpPr>
@@ -3506,7 +3554,7 @@
       </p:sp>
       <p:sp>
         <p:nvSpPr>
-          <p:cNvPr id="5" name="TextBox 4"/>
+          <p:cNvPr id="6" name="TextBox 5"/>
           <p:cNvSpPr txBox="1"/>
           <p:nvPr/>
         </p:nvSpPr>
@@ -3583,7 +3631,7 @@
         </p:nvSpPr>
         <p:spPr>
           <a:xfrm>
-            <a:off x="357187" y="4643437"/>
+            <a:off x="357187" y="4464843"/>
             <a:ext cx="4572000" cy="274320"/>
           </a:xfrm>
           <a:prstGeom prst="rect">
@@ -3628,7 +3676,7 @@
         </p:nvSpPr>
         <p:spPr>
           <a:xfrm>
-            <a:off x="5029200" y="4643437"/>
+            <a:off x="5029200" y="4464843"/>
             <a:ext cx="3749039" cy="274320"/>
           </a:xfrm>
           <a:prstGeom prst="rect">
@@ -3667,212 +3715,50 @@
       </p:sp>
       <p:sp>
         <p:nvSpPr>
-          <p:cNvPr id="4" name="TextBox 3"/>
-          <p:cNvSpPr txBox="1"/>
+          <p:cNvPr id="4" name="Rectangle 3"/>
+          <p:cNvSpPr/>
           <p:nvPr/>
         </p:nvSpPr>
         <p:spPr>
           <a:xfrm>
-            <a:off x="357187" y="357187"/>
-            <a:ext cx="8429625" cy="401835"/>
+            <a:off x="357187" y="4732734"/>
+            <a:ext cx="8429625" cy="8929"/>
           </a:xfrm>
           <a:prstGeom prst="rect">
             <a:avLst/>
           </a:prstGeom>
-          <a:noFill/>
-        </p:spPr>
-        <p:txBody>
-          <a:bodyPr wrap="square" tIns="0" bIns="0" lIns="0" rIns="0">
-            <a:spAutoFit/>
-          </a:bodyPr>
-          <a:lstStyle/>
-          <a:p>
-            <a:pPr algn="l">
-              <a:lnSpc>
-                <a:spcPct val="120000"/>
-              </a:lnSpc>
-              <a:defRPr sz="2600" b="1" i="0">
-                <a:solidFill>
-                  <a:srgbClr val="2C3440"/>
-                </a:solidFill>
-                <a:latin typeface="Arimo"/>
-              </a:defRPr>
-            </a:pPr>
-            <a:r>
-              <a:rPr sz="2600" b="1" i="0">
-                <a:solidFill>
-                  <a:srgbClr val="2C3440"/>
-                </a:solidFill>
-                <a:latin typeface="Arimo"/>
-              </a:rPr>
-              <a:t>Синтез коллагена и фотозащита</a:t>
-            </a:r>
-          </a:p>
-        </p:txBody>
-      </p:sp>
-      <p:sp>
-        <p:nvSpPr>
-          <p:cNvPr id="5" name="TextBox 4"/>
-          <p:cNvSpPr txBox="1"/>
-          <p:nvPr/>
-        </p:nvSpPr>
-        <p:spPr>
-          <a:xfrm>
-            <a:off x="357187" y="803671"/>
-            <a:ext cx="8429625" cy="267890"/>
-          </a:xfrm>
-          <a:prstGeom prst="rect">
-            <a:avLst/>
-          </a:prstGeom>
-          <a:noFill/>
-        </p:spPr>
-        <p:txBody>
-          <a:bodyPr wrap="square" tIns="0" bIns="0" lIns="0" rIns="0">
-            <a:spAutoFit/>
-          </a:bodyPr>
-          <a:lstStyle/>
-          <a:p>
-            <a:pPr algn="l">
-              <a:lnSpc>
-                <a:spcPct val="120000"/>
-              </a:lnSpc>
-              <a:defRPr sz="1500" b="0" i="0">
-                <a:solidFill>
-                  <a:srgbClr val="6D8470"/>
-                </a:solidFill>
-                <a:latin typeface="Arimo"/>
-              </a:defRPr>
-            </a:pPr>
-            <a:r>
-              <a:rPr sz="1500" b="0" i="0">
-                <a:solidFill>
-                  <a:srgbClr val="6D8470"/>
-                </a:solidFill>
-                <a:latin typeface="Arimo"/>
-              </a:rPr>
-              <a:t>Влияние топической L-аскорбиновой кислоты на дермальный матрикс</a:t>
-            </a:r>
-          </a:p>
-        </p:txBody>
-      </p:sp>
-      <p:sp>
-        <p:nvSpPr>
-          <p:cNvPr id="6" name="TextBox 5"/>
-          <p:cNvSpPr txBox="1"/>
-          <p:nvPr/>
-        </p:nvSpPr>
-        <p:spPr>
-          <a:xfrm>
-            <a:off x="357187" y="1339453"/>
-            <a:ext cx="4572000" cy="2926080"/>
-          </a:xfrm>
-          <a:prstGeom prst="rect">
-            <a:avLst/>
-          </a:prstGeom>
-          <a:noFill/>
-        </p:spPr>
-        <p:txBody>
-          <a:bodyPr wrap="square" tIns="0" bIns="0" lIns="0" rIns="0">
-            <a:spAutoFit/>
-          </a:bodyPr>
-          <a:lstStyle/>
-          <a:p>
-            <a:pPr algn="l">
-              <a:lnSpc>
-                <a:spcPct val="120000"/>
-              </a:lnSpc>
-              <a:defRPr sz="1500" b="0" i="0">
-                <a:solidFill>
-                  <a:srgbClr val="3D4A40"/>
-                </a:solidFill>
-                <a:latin typeface="Arimo"/>
-              </a:defRPr>
-            </a:pPr>
-            <a:r>
-              <a:rPr sz="1500" b="0" i="0">
-                <a:solidFill>
-                  <a:srgbClr val="3D4A40"/>
-                </a:solidFill>
-                <a:latin typeface="Arimo"/>
-              </a:rPr>
-              <a:t>• Активирует синтез коллагена I и III типов путем увеличения уровней мРНК in vivo.</a:t>
-            </a:r>
-          </a:p>
-          <a:p>
-            <a:pPr algn="l">
-              <a:lnSpc>
-                <a:spcPct val="120000"/>
-              </a:lnSpc>
-              <a:defRPr sz="1500" b="0" i="0">
-                <a:solidFill>
-                  <a:srgbClr val="3D4A40"/>
-                </a:solidFill>
-                <a:latin typeface="Arimo"/>
-              </a:defRPr>
-            </a:pPr>
-          </a:p>
-          <a:p>
-            <a:pPr algn="l">
-              <a:lnSpc>
-                <a:spcPct val="120000"/>
-              </a:lnSpc>
-              <a:defRPr sz="1500" b="0" i="0">
-                <a:solidFill>
-                  <a:srgbClr val="3D4A40"/>
-                </a:solidFill>
-                <a:latin typeface="Arimo"/>
-              </a:defRPr>
-            </a:pPr>
-            <a:r>
-              <a:rPr sz="1500" b="0" i="0">
-                <a:solidFill>
-                  <a:srgbClr val="3D4A40"/>
-                </a:solidFill>
-                <a:latin typeface="Arimo"/>
-              </a:rPr>
-              <a:t>• Защищает клетки кожи от индуцированного ультрафиолетом фотоповреждения.</a:t>
-            </a:r>
-          </a:p>
-          <a:p>
-            <a:pPr algn="l">
-              <a:lnSpc>
-                <a:spcPct val="120000"/>
-              </a:lnSpc>
-              <a:defRPr sz="1500" b="0" i="0">
-                <a:solidFill>
-                  <a:srgbClr val="3D4A40"/>
-                </a:solidFill>
-                <a:latin typeface="Arimo"/>
-              </a:defRPr>
-            </a:pPr>
-          </a:p>
-          <a:p>
-            <a:pPr algn="l">
-              <a:lnSpc>
-                <a:spcPct val="120000"/>
-              </a:lnSpc>
-              <a:defRPr sz="1500" b="0" i="0">
-                <a:solidFill>
-                  <a:srgbClr val="3D4A40"/>
-                </a:solidFill>
-                <a:latin typeface="Arimo"/>
-              </a:defRPr>
-            </a:pPr>
-            <a:r>
-              <a:rPr sz="1500" b="0" i="0">
-                <a:solidFill>
-                  <a:srgbClr val="3D4A40"/>
-                </a:solidFill>
-                <a:latin typeface="Arimo"/>
-              </a:rPr>
-              <a:t>• Стимулирует неоколлагенез и улучшает структурное состояние дермы.</a:t>
-            </a:r>
+          <a:solidFill>
+            <a:srgbClr val="D7E0CE"/>
+          </a:solidFill>
+          <a:ln>
+            <a:noFill/>
+          </a:ln>
+        </p:spPr>
+        <p:style>
+          <a:lnRef idx="1">
+            <a:schemeClr val="accent1"/>
+          </a:lnRef>
+          <a:fillRef idx="3">
+            <a:schemeClr val="accent1"/>
+          </a:fillRef>
+          <a:effectRef idx="2">
+            <a:schemeClr val="accent1"/>
+          </a:effectRef>
+          <a:fontRef idx="minor">
+            <a:schemeClr val="lt1"/>
+          </a:fontRef>
+        </p:style>
+        <p:txBody>
+          <a:bodyPr rtlCol="0" anchor="ctr"/>
+          <a:lstStyle/>
+          <a:p>
+            <a:pPr algn="ctr"/>
           </a:p>
         </p:txBody>
       </p:sp>
       <p:pic>
         <p:nvPicPr>
-          <p:cNvPr id="7" name="Picture 6" descr="collagen_synthesis.png"/>
+          <p:cNvPr id="5" name="Picture 4" descr="mark_6D8470.png"/>
           <p:cNvPicPr>
             <a:picLocks noChangeAspect="1"/>
           </p:cNvPicPr>
@@ -3880,6 +3766,325 @@
         </p:nvPicPr>
         <p:blipFill>
           <a:blip r:embed="rId2"/>
+          <a:stretch>
+            <a:fillRect/>
+          </a:stretch>
+        </p:blipFill>
+        <p:spPr>
+          <a:xfrm>
+            <a:off x="357187" y="4848820"/>
+            <a:ext cx="178593" cy="178593"/>
+          </a:xfrm>
+          <a:prstGeom prst="rect">
+            <a:avLst/>
+          </a:prstGeom>
+        </p:spPr>
+      </p:pic>
+      <p:sp>
+        <p:nvSpPr>
+          <p:cNvPr id="6" name="TextBox 5"/>
+          <p:cNvSpPr txBox="1"/>
+          <p:nvPr/>
+        </p:nvSpPr>
+        <p:spPr>
+          <a:xfrm>
+            <a:off x="607218" y="4830960"/>
+            <a:ext cx="1785937" cy="178593"/>
+          </a:xfrm>
+          <a:prstGeom prst="rect">
+            <a:avLst/>
+          </a:prstGeom>
+          <a:noFill/>
+        </p:spPr>
+        <p:txBody>
+          <a:bodyPr wrap="square" tIns="0" bIns="0" lIns="0" rIns="0">
+            <a:spAutoFit/>
+          </a:bodyPr>
+          <a:lstStyle/>
+          <a:p>
+            <a:pPr algn="l">
+              <a:lnSpc>
+                <a:spcPct val="120000"/>
+              </a:lnSpc>
+              <a:defRPr sz="1100" b="1" i="0">
+                <a:solidFill>
+                  <a:srgbClr val="3D4A40"/>
+                </a:solidFill>
+                <a:latin typeface="Arimo"/>
+              </a:defRPr>
+            </a:pPr>
+            <a:r>
+              <a:rPr sz="1100" b="1" i="0">
+                <a:solidFill>
+                  <a:srgbClr val="3D4A40"/>
+                </a:solidFill>
+                <a:latin typeface="Arimo"/>
+              </a:rPr>
+              <a:t>YM PROSKIN</a:t>
+            </a:r>
+          </a:p>
+        </p:txBody>
+      </p:sp>
+      <p:sp>
+        <p:nvSpPr>
+          <p:cNvPr id="7" name="TextBox 6"/>
+          <p:cNvSpPr txBox="1"/>
+          <p:nvPr/>
+        </p:nvSpPr>
+        <p:spPr>
+          <a:xfrm>
+            <a:off x="8251031" y="4830960"/>
+            <a:ext cx="535781" cy="178593"/>
+          </a:xfrm>
+          <a:prstGeom prst="rect">
+            <a:avLst/>
+          </a:prstGeom>
+          <a:noFill/>
+        </p:spPr>
+        <p:txBody>
+          <a:bodyPr wrap="square" tIns="0" bIns="0" lIns="0" rIns="0">
+            <a:spAutoFit/>
+          </a:bodyPr>
+          <a:lstStyle/>
+          <a:p>
+            <a:pPr algn="r">
+              <a:lnSpc>
+                <a:spcPct val="120000"/>
+              </a:lnSpc>
+              <a:defRPr sz="1100" b="0" i="0">
+                <a:solidFill>
+                  <a:srgbClr val="6D8470"/>
+                </a:solidFill>
+                <a:latin typeface="Arimo"/>
+              </a:defRPr>
+            </a:pPr>
+            <a:r>
+              <a:rPr sz="1100" b="0" i="0">
+                <a:solidFill>
+                  <a:srgbClr val="6D8470"/>
+                </a:solidFill>
+                <a:latin typeface="Arimo"/>
+              </a:rPr>
+              <a:t>3</a:t>
+            </a:r>
+          </a:p>
+        </p:txBody>
+      </p:sp>
+      <p:sp>
+        <p:nvSpPr>
+          <p:cNvPr id="8" name="TextBox 7"/>
+          <p:cNvSpPr txBox="1"/>
+          <p:nvPr/>
+        </p:nvSpPr>
+        <p:spPr>
+          <a:xfrm>
+            <a:off x="357187" y="357187"/>
+            <a:ext cx="8429625" cy="401835"/>
+          </a:xfrm>
+          <a:prstGeom prst="rect">
+            <a:avLst/>
+          </a:prstGeom>
+          <a:noFill/>
+        </p:spPr>
+        <p:txBody>
+          <a:bodyPr wrap="square" tIns="0" bIns="0" lIns="0" rIns="0">
+            <a:spAutoFit/>
+          </a:bodyPr>
+          <a:lstStyle/>
+          <a:p>
+            <a:pPr algn="l">
+              <a:lnSpc>
+                <a:spcPct val="120000"/>
+              </a:lnSpc>
+              <a:defRPr sz="2600" b="1" i="0">
+                <a:solidFill>
+                  <a:srgbClr val="2C3440"/>
+                </a:solidFill>
+                <a:latin typeface="Arimo"/>
+              </a:defRPr>
+            </a:pPr>
+            <a:r>
+              <a:rPr sz="2600" b="1" i="0">
+                <a:solidFill>
+                  <a:srgbClr val="2C3440"/>
+                </a:solidFill>
+                <a:latin typeface="Arimo"/>
+              </a:rPr>
+              <a:t>Синтез коллагена и фотозащита</a:t>
+            </a:r>
+          </a:p>
+        </p:txBody>
+      </p:sp>
+      <p:sp>
+        <p:nvSpPr>
+          <p:cNvPr id="9" name="TextBox 8"/>
+          <p:cNvSpPr txBox="1"/>
+          <p:nvPr/>
+        </p:nvSpPr>
+        <p:spPr>
+          <a:xfrm>
+            <a:off x="357187" y="803671"/>
+            <a:ext cx="8429625" cy="267890"/>
+          </a:xfrm>
+          <a:prstGeom prst="rect">
+            <a:avLst/>
+          </a:prstGeom>
+          <a:noFill/>
+        </p:spPr>
+        <p:txBody>
+          <a:bodyPr wrap="square" tIns="0" bIns="0" lIns="0" rIns="0">
+            <a:spAutoFit/>
+          </a:bodyPr>
+          <a:lstStyle/>
+          <a:p>
+            <a:pPr algn="l">
+              <a:lnSpc>
+                <a:spcPct val="120000"/>
+              </a:lnSpc>
+              <a:defRPr sz="1500" b="0" i="0">
+                <a:solidFill>
+                  <a:srgbClr val="6D8470"/>
+                </a:solidFill>
+                <a:latin typeface="Arimo"/>
+              </a:defRPr>
+            </a:pPr>
+            <a:r>
+              <a:rPr sz="1500" b="0" i="0">
+                <a:solidFill>
+                  <a:srgbClr val="6D8470"/>
+                </a:solidFill>
+                <a:latin typeface="Arimo"/>
+              </a:rPr>
+              <a:t>Влияние топической L-аскорбиновой кислоты на дермальный матрикс</a:t>
+            </a:r>
+          </a:p>
+        </p:txBody>
+      </p:sp>
+      <p:sp>
+        <p:nvSpPr>
+          <p:cNvPr id="10" name="TextBox 9"/>
+          <p:cNvSpPr txBox="1"/>
+          <p:nvPr/>
+        </p:nvSpPr>
+        <p:spPr>
+          <a:xfrm>
+            <a:off x="357187" y="1339453"/>
+            <a:ext cx="4572000" cy="2926080"/>
+          </a:xfrm>
+          <a:prstGeom prst="rect">
+            <a:avLst/>
+          </a:prstGeom>
+          <a:noFill/>
+        </p:spPr>
+        <p:txBody>
+          <a:bodyPr wrap="square" tIns="0" bIns="0" lIns="0" rIns="0">
+            <a:spAutoFit/>
+          </a:bodyPr>
+          <a:lstStyle/>
+          <a:p>
+            <a:pPr algn="l">
+              <a:lnSpc>
+                <a:spcPct val="120000"/>
+              </a:lnSpc>
+              <a:defRPr sz="1500" b="0" i="0">
+                <a:solidFill>
+                  <a:srgbClr val="3D4A40"/>
+                </a:solidFill>
+                <a:latin typeface="Arimo"/>
+              </a:defRPr>
+            </a:pPr>
+            <a:r>
+              <a:rPr sz="1500" b="0" i="0">
+                <a:solidFill>
+                  <a:srgbClr val="3D4A40"/>
+                </a:solidFill>
+                <a:latin typeface="Arimo"/>
+              </a:rPr>
+              <a:t>• Активирует синтез коллагена I и III типов путем увеличения уровней мРНК in vivo.</a:t>
+            </a:r>
+          </a:p>
+          <a:p>
+            <a:pPr algn="l">
+              <a:lnSpc>
+                <a:spcPct val="120000"/>
+              </a:lnSpc>
+              <a:defRPr sz="1500" b="0" i="0">
+                <a:solidFill>
+                  <a:srgbClr val="3D4A40"/>
+                </a:solidFill>
+                <a:latin typeface="Arimo"/>
+              </a:defRPr>
+            </a:pPr>
+          </a:p>
+          <a:p>
+            <a:pPr algn="l">
+              <a:lnSpc>
+                <a:spcPct val="120000"/>
+              </a:lnSpc>
+              <a:defRPr sz="1500" b="0" i="0">
+                <a:solidFill>
+                  <a:srgbClr val="3D4A40"/>
+                </a:solidFill>
+                <a:latin typeface="Arimo"/>
+              </a:defRPr>
+            </a:pPr>
+            <a:r>
+              <a:rPr sz="1500" b="0" i="0">
+                <a:solidFill>
+                  <a:srgbClr val="3D4A40"/>
+                </a:solidFill>
+                <a:latin typeface="Arimo"/>
+              </a:rPr>
+              <a:t>• Защищает клетки кожи от индуцированного ультрафиолетом фотоповреждения.</a:t>
+            </a:r>
+          </a:p>
+          <a:p>
+            <a:pPr algn="l">
+              <a:lnSpc>
+                <a:spcPct val="120000"/>
+              </a:lnSpc>
+              <a:defRPr sz="1500" b="0" i="0">
+                <a:solidFill>
+                  <a:srgbClr val="3D4A40"/>
+                </a:solidFill>
+                <a:latin typeface="Arimo"/>
+              </a:defRPr>
+            </a:pPr>
+          </a:p>
+          <a:p>
+            <a:pPr algn="l">
+              <a:lnSpc>
+                <a:spcPct val="120000"/>
+              </a:lnSpc>
+              <a:defRPr sz="1500" b="0" i="0">
+                <a:solidFill>
+                  <a:srgbClr val="3D4A40"/>
+                </a:solidFill>
+                <a:latin typeface="Arimo"/>
+              </a:defRPr>
+            </a:pPr>
+            <a:r>
+              <a:rPr sz="1500" b="0" i="0">
+                <a:solidFill>
+                  <a:srgbClr val="3D4A40"/>
+                </a:solidFill>
+                <a:latin typeface="Arimo"/>
+              </a:rPr>
+              <a:t>• Стимулирует неоколлагенез и улучшает структурное состояние дермы.</a:t>
+            </a:r>
+          </a:p>
+        </p:txBody>
+      </p:sp>
+      <p:pic>
+        <p:nvPicPr>
+          <p:cNvPr id="11" name="Picture 10" descr="collagen_synthesis.png"/>
+          <p:cNvPicPr>
+            <a:picLocks noChangeAspect="1"/>
+          </p:cNvPicPr>
+          <p:nvPr/>
+        </p:nvPicPr>
+        <p:blipFill>
+          <a:blip r:embed="rId3"/>
           <a:stretch>
             <a:fillRect/>
           </a:stretch>
@@ -3928,7 +4133,7 @@
         </p:nvSpPr>
         <p:spPr>
           <a:xfrm>
-            <a:off x="357187" y="4643437"/>
+            <a:off x="357187" y="4464843"/>
             <a:ext cx="4572000" cy="274320"/>
           </a:xfrm>
           <a:prstGeom prst="rect">
@@ -3973,7 +4178,7 @@
         </p:nvSpPr>
         <p:spPr>
           <a:xfrm>
-            <a:off x="5029200" y="4643437"/>
+            <a:off x="5029200" y="4464843"/>
             <a:ext cx="3749039" cy="274320"/>
           </a:xfrm>
           <a:prstGeom prst="rect">
@@ -4012,212 +4217,50 @@
       </p:sp>
       <p:sp>
         <p:nvSpPr>
-          <p:cNvPr id="4" name="TextBox 3"/>
-          <p:cNvSpPr txBox="1"/>
+          <p:cNvPr id="4" name="Rectangle 3"/>
+          <p:cNvSpPr/>
           <p:nvPr/>
         </p:nvSpPr>
         <p:spPr>
           <a:xfrm>
-            <a:off x="357187" y="357187"/>
-            <a:ext cx="8429625" cy="401835"/>
+            <a:off x="357187" y="4732734"/>
+            <a:ext cx="8429625" cy="8929"/>
           </a:xfrm>
           <a:prstGeom prst="rect">
             <a:avLst/>
           </a:prstGeom>
-          <a:noFill/>
-        </p:spPr>
-        <p:txBody>
-          <a:bodyPr wrap="square" tIns="0" bIns="0" lIns="0" rIns="0">
-            <a:spAutoFit/>
-          </a:bodyPr>
-          <a:lstStyle/>
-          <a:p>
-            <a:pPr algn="l">
-              <a:lnSpc>
-                <a:spcPct val="120000"/>
-              </a:lnSpc>
-              <a:defRPr sz="2600" b="1" i="0">
-                <a:solidFill>
-                  <a:srgbClr val="2C3440"/>
-                </a:solidFill>
-                <a:latin typeface="Arimo"/>
-              </a:defRPr>
-            </a:pPr>
-            <a:r>
-              <a:rPr sz="2600" b="1" i="0">
-                <a:solidFill>
-                  <a:srgbClr val="2C3440"/>
-                </a:solidFill>
-                <a:latin typeface="Arimo"/>
-              </a:rPr>
-              <a:t>Параметры абсорбции</a:t>
-            </a:r>
-          </a:p>
-        </p:txBody>
-      </p:sp>
-      <p:sp>
-        <p:nvSpPr>
-          <p:cNvPr id="5" name="TextBox 4"/>
-          <p:cNvSpPr txBox="1"/>
-          <p:nvPr/>
-        </p:nvSpPr>
-        <p:spPr>
-          <a:xfrm>
-            <a:off x="357187" y="803671"/>
-            <a:ext cx="8429625" cy="267890"/>
-          </a:xfrm>
-          <a:prstGeom prst="rect">
-            <a:avLst/>
-          </a:prstGeom>
-          <a:noFill/>
-        </p:spPr>
-        <p:txBody>
-          <a:bodyPr wrap="square" tIns="0" bIns="0" lIns="0" rIns="0">
-            <a:spAutoFit/>
-          </a:bodyPr>
-          <a:lstStyle/>
-          <a:p>
-            <a:pPr algn="l">
-              <a:lnSpc>
-                <a:spcPct val="120000"/>
-              </a:lnSpc>
-              <a:defRPr sz="1500" b="0" i="0">
-                <a:solidFill>
-                  <a:srgbClr val="6D8470"/>
-                </a:solidFill>
-                <a:latin typeface="Arimo"/>
-              </a:defRPr>
-            </a:pPr>
-            <a:r>
-              <a:rPr sz="1500" b="0" i="0">
-                <a:solidFill>
-                  <a:srgbClr val="6D8470"/>
-                </a:solidFill>
-                <a:latin typeface="Arimo"/>
-              </a:rPr>
-              <a:t>Влияние уровня pH и концентрации на чрескожное проникновение</a:t>
-            </a:r>
-          </a:p>
-        </p:txBody>
-      </p:sp>
-      <p:sp>
-        <p:nvSpPr>
-          <p:cNvPr id="6" name="TextBox 5"/>
-          <p:cNvSpPr txBox="1"/>
-          <p:nvPr/>
-        </p:nvSpPr>
-        <p:spPr>
-          <a:xfrm>
-            <a:off x="357187" y="1339453"/>
-            <a:ext cx="4572000" cy="2926080"/>
-          </a:xfrm>
-          <a:prstGeom prst="rect">
-            <a:avLst/>
-          </a:prstGeom>
-          <a:noFill/>
-        </p:spPr>
-        <p:txBody>
-          <a:bodyPr wrap="square" tIns="0" bIns="0" lIns="0" rIns="0">
-            <a:spAutoFit/>
-          </a:bodyPr>
-          <a:lstStyle/>
-          <a:p>
-            <a:pPr algn="l">
-              <a:lnSpc>
-                <a:spcPct val="120000"/>
-              </a:lnSpc>
-              <a:defRPr sz="1500" b="0" i="0">
-                <a:solidFill>
-                  <a:srgbClr val="3D4A40"/>
-                </a:solidFill>
-                <a:latin typeface="Arimo"/>
-              </a:defRPr>
-            </a:pPr>
-            <a:r>
-              <a:rPr sz="1500" b="0" i="0">
-                <a:solidFill>
-                  <a:srgbClr val="3D4A40"/>
-                </a:solidFill>
-                <a:latin typeface="Arimo"/>
-              </a:rPr>
-              <a:t>• Для проникновения через роговой слой уровень pH формулы должен быть строго ниже 3.5.</a:t>
-            </a:r>
-          </a:p>
-          <a:p>
-            <a:pPr algn="l">
-              <a:lnSpc>
-                <a:spcPct val="120000"/>
-              </a:lnSpc>
-              <a:defRPr sz="1500" b="0" i="0">
-                <a:solidFill>
-                  <a:srgbClr val="3D4A40"/>
-                </a:solidFill>
-                <a:latin typeface="Arimo"/>
-              </a:defRPr>
-            </a:pPr>
-          </a:p>
-          <a:p>
-            <a:pPr algn="l">
-              <a:lnSpc>
-                <a:spcPct val="120000"/>
-              </a:lnSpc>
-              <a:defRPr sz="1500" b="0" i="0">
-                <a:solidFill>
-                  <a:srgbClr val="3D4A40"/>
-                </a:solidFill>
-                <a:latin typeface="Arimo"/>
-              </a:defRPr>
-            </a:pPr>
-            <a:r>
-              <a:rPr sz="1500" b="0" i="0">
-                <a:solidFill>
-                  <a:srgbClr val="3D4A40"/>
-                </a:solidFill>
-                <a:latin typeface="Arimo"/>
-              </a:rPr>
-              <a:t>• Максимальная эффективная концентрация для чрескожного всасывания составляет 20%.</a:t>
-            </a:r>
-          </a:p>
-          <a:p>
-            <a:pPr algn="l">
-              <a:lnSpc>
-                <a:spcPct val="120000"/>
-              </a:lnSpc>
-              <a:defRPr sz="1500" b="0" i="0">
-                <a:solidFill>
-                  <a:srgbClr val="3D4A40"/>
-                </a:solidFill>
-                <a:latin typeface="Arimo"/>
-              </a:defRPr>
-            </a:pPr>
-          </a:p>
-          <a:p>
-            <a:pPr algn="l">
-              <a:lnSpc>
-                <a:spcPct val="120000"/>
-              </a:lnSpc>
-              <a:defRPr sz="1500" b="0" i="0">
-                <a:solidFill>
-                  <a:srgbClr val="3D4A40"/>
-                </a:solidFill>
-                <a:latin typeface="Arimo"/>
-              </a:defRPr>
-            </a:pPr>
-            <a:r>
-              <a:rPr sz="1500" b="0" i="0">
-                <a:solidFill>
-                  <a:srgbClr val="3D4A40"/>
-                </a:solidFill>
-                <a:latin typeface="Arimo"/>
-              </a:rPr>
-              <a:t>• Дальнейшее увеличение концентрации не повышает абсорбцию, но увеличивает риск раздражения.</a:t>
-            </a:r>
+          <a:solidFill>
+            <a:srgbClr val="D7E0CE"/>
+          </a:solidFill>
+          <a:ln>
+            <a:noFill/>
+          </a:ln>
+        </p:spPr>
+        <p:style>
+          <a:lnRef idx="1">
+            <a:schemeClr val="accent1"/>
+          </a:lnRef>
+          <a:fillRef idx="3">
+            <a:schemeClr val="accent1"/>
+          </a:fillRef>
+          <a:effectRef idx="2">
+            <a:schemeClr val="accent1"/>
+          </a:effectRef>
+          <a:fontRef idx="minor">
+            <a:schemeClr val="lt1"/>
+          </a:fontRef>
+        </p:style>
+        <p:txBody>
+          <a:bodyPr rtlCol="0" anchor="ctr"/>
+          <a:lstStyle/>
+          <a:p>
+            <a:pPr algn="ctr"/>
           </a:p>
         </p:txBody>
       </p:sp>
       <p:pic>
         <p:nvPicPr>
-          <p:cNvPr id="7" name="Picture 6" descr="ascorbic_acid_absorption.png"/>
+          <p:cNvPr id="5" name="Picture 4" descr="mark_6D8470.png"/>
           <p:cNvPicPr>
             <a:picLocks noChangeAspect="1"/>
           </p:cNvPicPr>
@@ -4225,6 +4268,325 @@
         </p:nvPicPr>
         <p:blipFill>
           <a:blip r:embed="rId2"/>
+          <a:stretch>
+            <a:fillRect/>
+          </a:stretch>
+        </p:blipFill>
+        <p:spPr>
+          <a:xfrm>
+            <a:off x="357187" y="4848820"/>
+            <a:ext cx="178593" cy="178593"/>
+          </a:xfrm>
+          <a:prstGeom prst="rect">
+            <a:avLst/>
+          </a:prstGeom>
+        </p:spPr>
+      </p:pic>
+      <p:sp>
+        <p:nvSpPr>
+          <p:cNvPr id="6" name="TextBox 5"/>
+          <p:cNvSpPr txBox="1"/>
+          <p:nvPr/>
+        </p:nvSpPr>
+        <p:spPr>
+          <a:xfrm>
+            <a:off x="607218" y="4830960"/>
+            <a:ext cx="1785937" cy="178593"/>
+          </a:xfrm>
+          <a:prstGeom prst="rect">
+            <a:avLst/>
+          </a:prstGeom>
+          <a:noFill/>
+        </p:spPr>
+        <p:txBody>
+          <a:bodyPr wrap="square" tIns="0" bIns="0" lIns="0" rIns="0">
+            <a:spAutoFit/>
+          </a:bodyPr>
+          <a:lstStyle/>
+          <a:p>
+            <a:pPr algn="l">
+              <a:lnSpc>
+                <a:spcPct val="120000"/>
+              </a:lnSpc>
+              <a:defRPr sz="1100" b="1" i="0">
+                <a:solidFill>
+                  <a:srgbClr val="3D4A40"/>
+                </a:solidFill>
+                <a:latin typeface="Arimo"/>
+              </a:defRPr>
+            </a:pPr>
+            <a:r>
+              <a:rPr sz="1100" b="1" i="0">
+                <a:solidFill>
+                  <a:srgbClr val="3D4A40"/>
+                </a:solidFill>
+                <a:latin typeface="Arimo"/>
+              </a:rPr>
+              <a:t>YM PROSKIN</a:t>
+            </a:r>
+          </a:p>
+        </p:txBody>
+      </p:sp>
+      <p:sp>
+        <p:nvSpPr>
+          <p:cNvPr id="7" name="TextBox 6"/>
+          <p:cNvSpPr txBox="1"/>
+          <p:nvPr/>
+        </p:nvSpPr>
+        <p:spPr>
+          <a:xfrm>
+            <a:off x="8251031" y="4830960"/>
+            <a:ext cx="535781" cy="178593"/>
+          </a:xfrm>
+          <a:prstGeom prst="rect">
+            <a:avLst/>
+          </a:prstGeom>
+          <a:noFill/>
+        </p:spPr>
+        <p:txBody>
+          <a:bodyPr wrap="square" tIns="0" bIns="0" lIns="0" rIns="0">
+            <a:spAutoFit/>
+          </a:bodyPr>
+          <a:lstStyle/>
+          <a:p>
+            <a:pPr algn="r">
+              <a:lnSpc>
+                <a:spcPct val="120000"/>
+              </a:lnSpc>
+              <a:defRPr sz="1100" b="0" i="0">
+                <a:solidFill>
+                  <a:srgbClr val="6D8470"/>
+                </a:solidFill>
+                <a:latin typeface="Arimo"/>
+              </a:defRPr>
+            </a:pPr>
+            <a:r>
+              <a:rPr sz="1100" b="0" i="0">
+                <a:solidFill>
+                  <a:srgbClr val="6D8470"/>
+                </a:solidFill>
+                <a:latin typeface="Arimo"/>
+              </a:rPr>
+              <a:t>4</a:t>
+            </a:r>
+          </a:p>
+        </p:txBody>
+      </p:sp>
+      <p:sp>
+        <p:nvSpPr>
+          <p:cNvPr id="8" name="TextBox 7"/>
+          <p:cNvSpPr txBox="1"/>
+          <p:nvPr/>
+        </p:nvSpPr>
+        <p:spPr>
+          <a:xfrm>
+            <a:off x="357187" y="357187"/>
+            <a:ext cx="8429625" cy="401835"/>
+          </a:xfrm>
+          <a:prstGeom prst="rect">
+            <a:avLst/>
+          </a:prstGeom>
+          <a:noFill/>
+        </p:spPr>
+        <p:txBody>
+          <a:bodyPr wrap="square" tIns="0" bIns="0" lIns="0" rIns="0">
+            <a:spAutoFit/>
+          </a:bodyPr>
+          <a:lstStyle/>
+          <a:p>
+            <a:pPr algn="l">
+              <a:lnSpc>
+                <a:spcPct val="120000"/>
+              </a:lnSpc>
+              <a:defRPr sz="2600" b="1" i="0">
+                <a:solidFill>
+                  <a:srgbClr val="2C3440"/>
+                </a:solidFill>
+                <a:latin typeface="Arimo"/>
+              </a:defRPr>
+            </a:pPr>
+            <a:r>
+              <a:rPr sz="2600" b="1" i="0">
+                <a:solidFill>
+                  <a:srgbClr val="2C3440"/>
+                </a:solidFill>
+                <a:latin typeface="Arimo"/>
+              </a:rPr>
+              <a:t>Параметры абсорбции</a:t>
+            </a:r>
+          </a:p>
+        </p:txBody>
+      </p:sp>
+      <p:sp>
+        <p:nvSpPr>
+          <p:cNvPr id="9" name="TextBox 8"/>
+          <p:cNvSpPr txBox="1"/>
+          <p:nvPr/>
+        </p:nvSpPr>
+        <p:spPr>
+          <a:xfrm>
+            <a:off x="357187" y="803671"/>
+            <a:ext cx="8429625" cy="267890"/>
+          </a:xfrm>
+          <a:prstGeom prst="rect">
+            <a:avLst/>
+          </a:prstGeom>
+          <a:noFill/>
+        </p:spPr>
+        <p:txBody>
+          <a:bodyPr wrap="square" tIns="0" bIns="0" lIns="0" rIns="0">
+            <a:spAutoFit/>
+          </a:bodyPr>
+          <a:lstStyle/>
+          <a:p>
+            <a:pPr algn="l">
+              <a:lnSpc>
+                <a:spcPct val="120000"/>
+              </a:lnSpc>
+              <a:defRPr sz="1500" b="0" i="0">
+                <a:solidFill>
+                  <a:srgbClr val="6D8470"/>
+                </a:solidFill>
+                <a:latin typeface="Arimo"/>
+              </a:defRPr>
+            </a:pPr>
+            <a:r>
+              <a:rPr sz="1500" b="0" i="0">
+                <a:solidFill>
+                  <a:srgbClr val="6D8470"/>
+                </a:solidFill>
+                <a:latin typeface="Arimo"/>
+              </a:rPr>
+              <a:t>Влияние уровня pH и концентрации на чрескожное проникновение</a:t>
+            </a:r>
+          </a:p>
+        </p:txBody>
+      </p:sp>
+      <p:sp>
+        <p:nvSpPr>
+          <p:cNvPr id="10" name="TextBox 9"/>
+          <p:cNvSpPr txBox="1"/>
+          <p:nvPr/>
+        </p:nvSpPr>
+        <p:spPr>
+          <a:xfrm>
+            <a:off x="357187" y="1339453"/>
+            <a:ext cx="4572000" cy="2926080"/>
+          </a:xfrm>
+          <a:prstGeom prst="rect">
+            <a:avLst/>
+          </a:prstGeom>
+          <a:noFill/>
+        </p:spPr>
+        <p:txBody>
+          <a:bodyPr wrap="square" tIns="0" bIns="0" lIns="0" rIns="0">
+            <a:spAutoFit/>
+          </a:bodyPr>
+          <a:lstStyle/>
+          <a:p>
+            <a:pPr algn="l">
+              <a:lnSpc>
+                <a:spcPct val="120000"/>
+              </a:lnSpc>
+              <a:defRPr sz="1500" b="0" i="0">
+                <a:solidFill>
+                  <a:srgbClr val="3D4A40"/>
+                </a:solidFill>
+                <a:latin typeface="Arimo"/>
+              </a:defRPr>
+            </a:pPr>
+            <a:r>
+              <a:rPr sz="1500" b="0" i="0">
+                <a:solidFill>
+                  <a:srgbClr val="3D4A40"/>
+                </a:solidFill>
+                <a:latin typeface="Arimo"/>
+              </a:rPr>
+              <a:t>• Для проникновения через роговой слой уровень pH формулы должен быть строго ниже 3.5.</a:t>
+            </a:r>
+          </a:p>
+          <a:p>
+            <a:pPr algn="l">
+              <a:lnSpc>
+                <a:spcPct val="120000"/>
+              </a:lnSpc>
+              <a:defRPr sz="1500" b="0" i="0">
+                <a:solidFill>
+                  <a:srgbClr val="3D4A40"/>
+                </a:solidFill>
+                <a:latin typeface="Arimo"/>
+              </a:defRPr>
+            </a:pPr>
+          </a:p>
+          <a:p>
+            <a:pPr algn="l">
+              <a:lnSpc>
+                <a:spcPct val="120000"/>
+              </a:lnSpc>
+              <a:defRPr sz="1500" b="0" i="0">
+                <a:solidFill>
+                  <a:srgbClr val="3D4A40"/>
+                </a:solidFill>
+                <a:latin typeface="Arimo"/>
+              </a:defRPr>
+            </a:pPr>
+            <a:r>
+              <a:rPr sz="1500" b="0" i="0">
+                <a:solidFill>
+                  <a:srgbClr val="3D4A40"/>
+                </a:solidFill>
+                <a:latin typeface="Arimo"/>
+              </a:rPr>
+              <a:t>• Максимальная эффективная концентрация для чрескожного всасывания составляет 20%.</a:t>
+            </a:r>
+          </a:p>
+          <a:p>
+            <a:pPr algn="l">
+              <a:lnSpc>
+                <a:spcPct val="120000"/>
+              </a:lnSpc>
+              <a:defRPr sz="1500" b="0" i="0">
+                <a:solidFill>
+                  <a:srgbClr val="3D4A40"/>
+                </a:solidFill>
+                <a:latin typeface="Arimo"/>
+              </a:defRPr>
+            </a:pPr>
+          </a:p>
+          <a:p>
+            <a:pPr algn="l">
+              <a:lnSpc>
+                <a:spcPct val="120000"/>
+              </a:lnSpc>
+              <a:defRPr sz="1500" b="0" i="0">
+                <a:solidFill>
+                  <a:srgbClr val="3D4A40"/>
+                </a:solidFill>
+                <a:latin typeface="Arimo"/>
+              </a:defRPr>
+            </a:pPr>
+            <a:r>
+              <a:rPr sz="1500" b="0" i="0">
+                <a:solidFill>
+                  <a:srgbClr val="3D4A40"/>
+                </a:solidFill>
+                <a:latin typeface="Arimo"/>
+              </a:rPr>
+              <a:t>• Дальнейшее увеличение концентрации не повышает абсорбцию, но увеличивает риск раздражения.</a:t>
+            </a:r>
+          </a:p>
+        </p:txBody>
+      </p:sp>
+      <p:pic>
+        <p:nvPicPr>
+          <p:cNvPr id="11" name="Picture 10" descr="ascorbic_acid_absorption.png"/>
+          <p:cNvPicPr>
+            <a:picLocks noChangeAspect="1"/>
+          </p:cNvPicPr>
+          <p:nvPr/>
+        </p:nvPicPr>
+        <p:blipFill>
+          <a:blip r:embed="rId3"/>
           <a:stretch>
             <a:fillRect/>
           </a:stretch>
@@ -4273,7 +4635,7 @@
         </p:nvSpPr>
         <p:spPr>
           <a:xfrm>
-            <a:off x="357187" y="4643437"/>
+            <a:off x="357187" y="4464843"/>
             <a:ext cx="4572000" cy="274320"/>
           </a:xfrm>
           <a:prstGeom prst="rect">
@@ -4318,7 +4680,7 @@
         </p:nvSpPr>
         <p:spPr>
           <a:xfrm>
-            <a:off x="5029200" y="4643437"/>
+            <a:off x="5029200" y="4464843"/>
             <a:ext cx="3749039" cy="274320"/>
           </a:xfrm>
           <a:prstGeom prst="rect">
@@ -4357,212 +4719,50 @@
       </p:sp>
       <p:sp>
         <p:nvSpPr>
-          <p:cNvPr id="4" name="TextBox 3"/>
-          <p:cNvSpPr txBox="1"/>
+          <p:cNvPr id="4" name="Rectangle 3"/>
+          <p:cNvSpPr/>
           <p:nvPr/>
         </p:nvSpPr>
         <p:spPr>
           <a:xfrm>
-            <a:off x="357187" y="357187"/>
-            <a:ext cx="8429625" cy="401835"/>
+            <a:off x="357187" y="4732734"/>
+            <a:ext cx="8429625" cy="8929"/>
           </a:xfrm>
           <a:prstGeom prst="rect">
             <a:avLst/>
           </a:prstGeom>
-          <a:noFill/>
-        </p:spPr>
-        <p:txBody>
-          <a:bodyPr wrap="square" tIns="0" bIns="0" lIns="0" rIns="0">
-            <a:spAutoFit/>
-          </a:bodyPr>
-          <a:lstStyle/>
-          <a:p>
-            <a:pPr algn="l">
-              <a:lnSpc>
-                <a:spcPct val="120000"/>
-              </a:lnSpc>
-              <a:defRPr sz="2600" b="1" i="0">
-                <a:solidFill>
-                  <a:srgbClr val="2C3440"/>
-                </a:solidFill>
-                <a:latin typeface="Arimo"/>
-              </a:defRPr>
-            </a:pPr>
-            <a:r>
-              <a:rPr sz="2600" b="1" i="0">
-                <a:solidFill>
-                  <a:srgbClr val="2C3440"/>
-                </a:solidFill>
-                <a:latin typeface="Arimo"/>
-              </a:rPr>
-              <a:t>Терапия акне: Аскорбилфосфат Натрия</a:t>
-            </a:r>
-          </a:p>
-        </p:txBody>
-      </p:sp>
-      <p:sp>
-        <p:nvSpPr>
-          <p:cNvPr id="5" name="TextBox 4"/>
-          <p:cNvSpPr txBox="1"/>
-          <p:nvPr/>
-        </p:nvSpPr>
-        <p:spPr>
-          <a:xfrm>
-            <a:off x="357187" y="803671"/>
-            <a:ext cx="8429625" cy="267890"/>
-          </a:xfrm>
-          <a:prstGeom prst="rect">
-            <a:avLst/>
-          </a:prstGeom>
-          <a:noFill/>
-        </p:spPr>
-        <p:txBody>
-          <a:bodyPr wrap="square" tIns="0" bIns="0" lIns="0" rIns="0">
-            <a:spAutoFit/>
-          </a:bodyPr>
-          <a:lstStyle/>
-          <a:p>
-            <a:pPr algn="l">
-              <a:lnSpc>
-                <a:spcPct val="120000"/>
-              </a:lnSpc>
-              <a:defRPr sz="1500" b="0" i="0">
-                <a:solidFill>
-                  <a:srgbClr val="6D8470"/>
-                </a:solidFill>
-                <a:latin typeface="Arimo"/>
-              </a:defRPr>
-            </a:pPr>
-            <a:r>
-              <a:rPr sz="1500" b="0" i="0">
-                <a:solidFill>
-                  <a:srgbClr val="6D8470"/>
-                </a:solidFill>
-                <a:latin typeface="Arimo"/>
-              </a:rPr>
-              <a:t>Стабильный дериват витамина C (SAP) в лечении акне средней тяжести</a:t>
-            </a:r>
-          </a:p>
-        </p:txBody>
-      </p:sp>
-      <p:sp>
-        <p:nvSpPr>
-          <p:cNvPr id="6" name="TextBox 5"/>
-          <p:cNvSpPr txBox="1"/>
-          <p:nvPr/>
-        </p:nvSpPr>
-        <p:spPr>
-          <a:xfrm>
-            <a:off x="357187" y="1339453"/>
-            <a:ext cx="4572000" cy="2926080"/>
-          </a:xfrm>
-          <a:prstGeom prst="rect">
-            <a:avLst/>
-          </a:prstGeom>
-          <a:noFill/>
-        </p:spPr>
-        <p:txBody>
-          <a:bodyPr wrap="square" tIns="0" bIns="0" lIns="0" rIns="0">
-            <a:spAutoFit/>
-          </a:bodyPr>
-          <a:lstStyle/>
-          <a:p>
-            <a:pPr algn="l">
-              <a:lnSpc>
-                <a:spcPct val="120000"/>
-              </a:lnSpc>
-              <a:defRPr sz="1500" b="0" i="0">
-                <a:solidFill>
-                  <a:srgbClr val="3D4A40"/>
-                </a:solidFill>
-                <a:latin typeface="Arimo"/>
-              </a:defRPr>
-            </a:pPr>
-            <a:r>
-              <a:rPr sz="1500" b="0" i="0">
-                <a:solidFill>
-                  <a:srgbClr val="3D4A40"/>
-                </a:solidFill>
-                <a:latin typeface="Arimo"/>
-              </a:rPr>
-              <a:t>• Топический 5% лосьон SAP демонстрирует высокую клиническую эффективность при акне.</a:t>
-            </a:r>
-          </a:p>
-          <a:p>
-            <a:pPr algn="l">
-              <a:lnSpc>
-                <a:spcPct val="120000"/>
-              </a:lnSpc>
-              <a:defRPr sz="1500" b="0" i="0">
-                <a:solidFill>
-                  <a:srgbClr val="3D4A40"/>
-                </a:solidFill>
-                <a:latin typeface="Arimo"/>
-              </a:defRPr>
-            </a:pPr>
-          </a:p>
-          <a:p>
-            <a:pPr algn="l">
-              <a:lnSpc>
-                <a:spcPct val="120000"/>
-              </a:lnSpc>
-              <a:defRPr sz="1500" b="0" i="0">
-                <a:solidFill>
-                  <a:srgbClr val="3D4A40"/>
-                </a:solidFill>
-                <a:latin typeface="Arimo"/>
-              </a:defRPr>
-            </a:pPr>
-            <a:r>
-              <a:rPr sz="1500" b="0" i="0">
-                <a:solidFill>
-                  <a:srgbClr val="3D4A40"/>
-                </a:solidFill>
-                <a:latin typeface="Arimo"/>
-              </a:rPr>
-              <a:t>• SAP стабилен при нейтральном значении pH и минимизирует раздражение кожи.</a:t>
-            </a:r>
-          </a:p>
-          <a:p>
-            <a:pPr algn="l">
-              <a:lnSpc>
-                <a:spcPct val="120000"/>
-              </a:lnSpc>
-              <a:defRPr sz="1500" b="0" i="0">
-                <a:solidFill>
-                  <a:srgbClr val="3D4A40"/>
-                </a:solidFill>
-                <a:latin typeface="Arimo"/>
-              </a:defRPr>
-            </a:pPr>
-          </a:p>
-          <a:p>
-            <a:pPr algn="l">
-              <a:lnSpc>
-                <a:spcPct val="120000"/>
-              </a:lnSpc>
-              <a:defRPr sz="1500" b="0" i="0">
-                <a:solidFill>
-                  <a:srgbClr val="3D4A40"/>
-                </a:solidFill>
-                <a:latin typeface="Arimo"/>
-              </a:defRPr>
-            </a:pPr>
-            <a:r>
-              <a:rPr sz="1500" b="0" i="0">
-                <a:solidFill>
-                  <a:srgbClr val="3D4A40"/>
-                </a:solidFill>
-                <a:latin typeface="Arimo"/>
-              </a:rPr>
-              <a:t>• Обладает сильным антиоксидантным и себорегулирующим потенциалом.</a:t>
-            </a:r>
+          <a:solidFill>
+            <a:srgbClr val="D7E0CE"/>
+          </a:solidFill>
+          <a:ln>
+            <a:noFill/>
+          </a:ln>
+        </p:spPr>
+        <p:style>
+          <a:lnRef idx="1">
+            <a:schemeClr val="accent1"/>
+          </a:lnRef>
+          <a:fillRef idx="3">
+            <a:schemeClr val="accent1"/>
+          </a:fillRef>
+          <a:effectRef idx="2">
+            <a:schemeClr val="accent1"/>
+          </a:effectRef>
+          <a:fontRef idx="minor">
+            <a:schemeClr val="lt1"/>
+          </a:fontRef>
+        </p:style>
+        <p:txBody>
+          <a:bodyPr rtlCol="0" anchor="ctr"/>
+          <a:lstStyle/>
+          <a:p>
+            <a:pPr algn="ctr"/>
           </a:p>
         </p:txBody>
       </p:sp>
       <p:pic>
         <p:nvPicPr>
-          <p:cNvPr id="7" name="Picture 6" descr="sodium_ascorbyl_phosphate.png"/>
+          <p:cNvPr id="5" name="Picture 4" descr="mark_6D8470.png"/>
           <p:cNvPicPr>
             <a:picLocks noChangeAspect="1"/>
           </p:cNvPicPr>
@@ -4570,6 +4770,325 @@
         </p:nvPicPr>
         <p:blipFill>
           <a:blip r:embed="rId2"/>
+          <a:stretch>
+            <a:fillRect/>
+          </a:stretch>
+        </p:blipFill>
+        <p:spPr>
+          <a:xfrm>
+            <a:off x="357187" y="4848820"/>
+            <a:ext cx="178593" cy="178593"/>
+          </a:xfrm>
+          <a:prstGeom prst="rect">
+            <a:avLst/>
+          </a:prstGeom>
+        </p:spPr>
+      </p:pic>
+      <p:sp>
+        <p:nvSpPr>
+          <p:cNvPr id="6" name="TextBox 5"/>
+          <p:cNvSpPr txBox="1"/>
+          <p:nvPr/>
+        </p:nvSpPr>
+        <p:spPr>
+          <a:xfrm>
+            <a:off x="607218" y="4830960"/>
+            <a:ext cx="1785937" cy="178593"/>
+          </a:xfrm>
+          <a:prstGeom prst="rect">
+            <a:avLst/>
+          </a:prstGeom>
+          <a:noFill/>
+        </p:spPr>
+        <p:txBody>
+          <a:bodyPr wrap="square" tIns="0" bIns="0" lIns="0" rIns="0">
+            <a:spAutoFit/>
+          </a:bodyPr>
+          <a:lstStyle/>
+          <a:p>
+            <a:pPr algn="l">
+              <a:lnSpc>
+                <a:spcPct val="120000"/>
+              </a:lnSpc>
+              <a:defRPr sz="1100" b="1" i="0">
+                <a:solidFill>
+                  <a:srgbClr val="3D4A40"/>
+                </a:solidFill>
+                <a:latin typeface="Arimo"/>
+              </a:defRPr>
+            </a:pPr>
+            <a:r>
+              <a:rPr sz="1100" b="1" i="0">
+                <a:solidFill>
+                  <a:srgbClr val="3D4A40"/>
+                </a:solidFill>
+                <a:latin typeface="Arimo"/>
+              </a:rPr>
+              <a:t>YM PROSKIN</a:t>
+            </a:r>
+          </a:p>
+        </p:txBody>
+      </p:sp>
+      <p:sp>
+        <p:nvSpPr>
+          <p:cNvPr id="7" name="TextBox 6"/>
+          <p:cNvSpPr txBox="1"/>
+          <p:nvPr/>
+        </p:nvSpPr>
+        <p:spPr>
+          <a:xfrm>
+            <a:off x="8251031" y="4830960"/>
+            <a:ext cx="535781" cy="178593"/>
+          </a:xfrm>
+          <a:prstGeom prst="rect">
+            <a:avLst/>
+          </a:prstGeom>
+          <a:noFill/>
+        </p:spPr>
+        <p:txBody>
+          <a:bodyPr wrap="square" tIns="0" bIns="0" lIns="0" rIns="0">
+            <a:spAutoFit/>
+          </a:bodyPr>
+          <a:lstStyle/>
+          <a:p>
+            <a:pPr algn="r">
+              <a:lnSpc>
+                <a:spcPct val="120000"/>
+              </a:lnSpc>
+              <a:defRPr sz="1100" b="0" i="0">
+                <a:solidFill>
+                  <a:srgbClr val="6D8470"/>
+                </a:solidFill>
+                <a:latin typeface="Arimo"/>
+              </a:defRPr>
+            </a:pPr>
+            <a:r>
+              <a:rPr sz="1100" b="0" i="0">
+                <a:solidFill>
+                  <a:srgbClr val="6D8470"/>
+                </a:solidFill>
+                <a:latin typeface="Arimo"/>
+              </a:rPr>
+              <a:t>5</a:t>
+            </a:r>
+          </a:p>
+        </p:txBody>
+      </p:sp>
+      <p:sp>
+        <p:nvSpPr>
+          <p:cNvPr id="8" name="TextBox 7"/>
+          <p:cNvSpPr txBox="1"/>
+          <p:nvPr/>
+        </p:nvSpPr>
+        <p:spPr>
+          <a:xfrm>
+            <a:off x="357187" y="357187"/>
+            <a:ext cx="8429625" cy="401835"/>
+          </a:xfrm>
+          <a:prstGeom prst="rect">
+            <a:avLst/>
+          </a:prstGeom>
+          <a:noFill/>
+        </p:spPr>
+        <p:txBody>
+          <a:bodyPr wrap="square" tIns="0" bIns="0" lIns="0" rIns="0">
+            <a:spAutoFit/>
+          </a:bodyPr>
+          <a:lstStyle/>
+          <a:p>
+            <a:pPr algn="l">
+              <a:lnSpc>
+                <a:spcPct val="120000"/>
+              </a:lnSpc>
+              <a:defRPr sz="2600" b="1" i="0">
+                <a:solidFill>
+                  <a:srgbClr val="2C3440"/>
+                </a:solidFill>
+                <a:latin typeface="Arimo"/>
+              </a:defRPr>
+            </a:pPr>
+            <a:r>
+              <a:rPr sz="2600" b="1" i="0">
+                <a:solidFill>
+                  <a:srgbClr val="2C3440"/>
+                </a:solidFill>
+                <a:latin typeface="Arimo"/>
+              </a:rPr>
+              <a:t>Терапия акне: Аскорбилфосфат Натрия</a:t>
+            </a:r>
+          </a:p>
+        </p:txBody>
+      </p:sp>
+      <p:sp>
+        <p:nvSpPr>
+          <p:cNvPr id="9" name="TextBox 8"/>
+          <p:cNvSpPr txBox="1"/>
+          <p:nvPr/>
+        </p:nvSpPr>
+        <p:spPr>
+          <a:xfrm>
+            <a:off x="357187" y="803671"/>
+            <a:ext cx="8429625" cy="267890"/>
+          </a:xfrm>
+          <a:prstGeom prst="rect">
+            <a:avLst/>
+          </a:prstGeom>
+          <a:noFill/>
+        </p:spPr>
+        <p:txBody>
+          <a:bodyPr wrap="square" tIns="0" bIns="0" lIns="0" rIns="0">
+            <a:spAutoFit/>
+          </a:bodyPr>
+          <a:lstStyle/>
+          <a:p>
+            <a:pPr algn="l">
+              <a:lnSpc>
+                <a:spcPct val="120000"/>
+              </a:lnSpc>
+              <a:defRPr sz="1500" b="0" i="0">
+                <a:solidFill>
+                  <a:srgbClr val="6D8470"/>
+                </a:solidFill>
+                <a:latin typeface="Arimo"/>
+              </a:defRPr>
+            </a:pPr>
+            <a:r>
+              <a:rPr sz="1500" b="0" i="0">
+                <a:solidFill>
+                  <a:srgbClr val="6D8470"/>
+                </a:solidFill>
+                <a:latin typeface="Arimo"/>
+              </a:rPr>
+              <a:t>Стабильный дериват витамина C (SAP) в лечении акне средней тяжести</a:t>
+            </a:r>
+          </a:p>
+        </p:txBody>
+      </p:sp>
+      <p:sp>
+        <p:nvSpPr>
+          <p:cNvPr id="10" name="TextBox 9"/>
+          <p:cNvSpPr txBox="1"/>
+          <p:nvPr/>
+        </p:nvSpPr>
+        <p:spPr>
+          <a:xfrm>
+            <a:off x="357187" y="1339453"/>
+            <a:ext cx="4572000" cy="2926080"/>
+          </a:xfrm>
+          <a:prstGeom prst="rect">
+            <a:avLst/>
+          </a:prstGeom>
+          <a:noFill/>
+        </p:spPr>
+        <p:txBody>
+          <a:bodyPr wrap="square" tIns="0" bIns="0" lIns="0" rIns="0">
+            <a:spAutoFit/>
+          </a:bodyPr>
+          <a:lstStyle/>
+          <a:p>
+            <a:pPr algn="l">
+              <a:lnSpc>
+                <a:spcPct val="120000"/>
+              </a:lnSpc>
+              <a:defRPr sz="1500" b="0" i="0">
+                <a:solidFill>
+                  <a:srgbClr val="3D4A40"/>
+                </a:solidFill>
+                <a:latin typeface="Arimo"/>
+              </a:defRPr>
+            </a:pPr>
+            <a:r>
+              <a:rPr sz="1500" b="0" i="0">
+                <a:solidFill>
+                  <a:srgbClr val="3D4A40"/>
+                </a:solidFill>
+                <a:latin typeface="Arimo"/>
+              </a:rPr>
+              <a:t>• Топический 5% лосьон SAP демонстрирует высокую клиническую эффективность при акне.</a:t>
+            </a:r>
+          </a:p>
+          <a:p>
+            <a:pPr algn="l">
+              <a:lnSpc>
+                <a:spcPct val="120000"/>
+              </a:lnSpc>
+              <a:defRPr sz="1500" b="0" i="0">
+                <a:solidFill>
+                  <a:srgbClr val="3D4A40"/>
+                </a:solidFill>
+                <a:latin typeface="Arimo"/>
+              </a:defRPr>
+            </a:pPr>
+          </a:p>
+          <a:p>
+            <a:pPr algn="l">
+              <a:lnSpc>
+                <a:spcPct val="120000"/>
+              </a:lnSpc>
+              <a:defRPr sz="1500" b="0" i="0">
+                <a:solidFill>
+                  <a:srgbClr val="3D4A40"/>
+                </a:solidFill>
+                <a:latin typeface="Arimo"/>
+              </a:defRPr>
+            </a:pPr>
+            <a:r>
+              <a:rPr sz="1500" b="0" i="0">
+                <a:solidFill>
+                  <a:srgbClr val="3D4A40"/>
+                </a:solidFill>
+                <a:latin typeface="Arimo"/>
+              </a:rPr>
+              <a:t>• SAP стабилен при нейтральном значении pH и минимизирует раздражение кожи.</a:t>
+            </a:r>
+          </a:p>
+          <a:p>
+            <a:pPr algn="l">
+              <a:lnSpc>
+                <a:spcPct val="120000"/>
+              </a:lnSpc>
+              <a:defRPr sz="1500" b="0" i="0">
+                <a:solidFill>
+                  <a:srgbClr val="3D4A40"/>
+                </a:solidFill>
+                <a:latin typeface="Arimo"/>
+              </a:defRPr>
+            </a:pPr>
+          </a:p>
+          <a:p>
+            <a:pPr algn="l">
+              <a:lnSpc>
+                <a:spcPct val="120000"/>
+              </a:lnSpc>
+              <a:defRPr sz="1500" b="0" i="0">
+                <a:solidFill>
+                  <a:srgbClr val="3D4A40"/>
+                </a:solidFill>
+                <a:latin typeface="Arimo"/>
+              </a:defRPr>
+            </a:pPr>
+            <a:r>
+              <a:rPr sz="1500" b="0" i="0">
+                <a:solidFill>
+                  <a:srgbClr val="3D4A40"/>
+                </a:solidFill>
+                <a:latin typeface="Arimo"/>
+              </a:rPr>
+              <a:t>• Обладает сильным антиоксидантным и себорегулирующим потенциалом.</a:t>
+            </a:r>
+          </a:p>
+        </p:txBody>
+      </p:sp>
+      <p:pic>
+        <p:nvPicPr>
+          <p:cNvPr id="11" name="Picture 10" descr="sodium_ascorbyl_phosphate.png"/>
+          <p:cNvPicPr>
+            <a:picLocks noChangeAspect="1"/>
+          </p:cNvPicPr>
+          <p:nvPr/>
+        </p:nvPicPr>
+        <p:blipFill>
+          <a:blip r:embed="rId3"/>
           <a:stretch>
             <a:fillRect/>
           </a:stretch>
@@ -4618,7 +5137,7 @@
         </p:nvSpPr>
         <p:spPr>
           <a:xfrm>
-            <a:off x="357187" y="4643437"/>
+            <a:off x="357187" y="4464843"/>
             <a:ext cx="4572000" cy="274320"/>
           </a:xfrm>
           <a:prstGeom prst="rect">
@@ -4663,7 +5182,7 @@
         </p:nvSpPr>
         <p:spPr>
           <a:xfrm>
-            <a:off x="5029200" y="4643437"/>
+            <a:off x="5029200" y="4464843"/>
             <a:ext cx="3749039" cy="274320"/>
           </a:xfrm>
           <a:prstGeom prst="rect">
@@ -4702,115 +5221,23 @@
       </p:sp>
       <p:sp>
         <p:nvSpPr>
-          <p:cNvPr id="4" name="TextBox 3"/>
-          <p:cNvSpPr txBox="1"/>
-          <p:nvPr/>
-        </p:nvSpPr>
-        <p:spPr>
-          <a:xfrm>
-            <a:off x="357187" y="357187"/>
-            <a:ext cx="8429625" cy="401835"/>
-          </a:xfrm>
-          <a:prstGeom prst="rect">
-            <a:avLst/>
-          </a:prstGeom>
-          <a:noFill/>
-        </p:spPr>
-        <p:txBody>
-          <a:bodyPr wrap="square" tIns="0" bIns="0" lIns="0" rIns="0">
-            <a:spAutoFit/>
-          </a:bodyPr>
-          <a:lstStyle/>
-          <a:p>
-            <a:pPr algn="l">
-              <a:lnSpc>
-                <a:spcPct val="120000"/>
-              </a:lnSpc>
-              <a:defRPr sz="2600" b="1" i="0">
-                <a:solidFill>
-                  <a:srgbClr val="2C3440"/>
-                </a:solidFill>
-                <a:latin typeface="Arimo"/>
-              </a:defRPr>
-            </a:pPr>
-            <a:r>
-              <a:rPr sz="2600" b="1" i="0">
-                <a:solidFill>
-                  <a:srgbClr val="2C3440"/>
-                </a:solidFill>
-                <a:latin typeface="Arimo"/>
-              </a:rPr>
-              <a:t>Местная Переносимость</a:t>
-            </a:r>
-          </a:p>
-        </p:txBody>
-      </p:sp>
-      <p:sp>
-        <p:nvSpPr>
-          <p:cNvPr id="5" name="TextBox 4"/>
-          <p:cNvSpPr txBox="1"/>
-          <p:nvPr/>
-        </p:nvSpPr>
-        <p:spPr>
-          <a:xfrm>
-            <a:off x="357187" y="803671"/>
-            <a:ext cx="8429625" cy="267890"/>
-          </a:xfrm>
-          <a:prstGeom prst="rect">
-            <a:avLst/>
-          </a:prstGeom>
-          <a:noFill/>
-        </p:spPr>
-        <p:txBody>
-          <a:bodyPr wrap="square" tIns="0" bIns="0" lIns="0" rIns="0">
-            <a:spAutoFit/>
-          </a:bodyPr>
-          <a:lstStyle/>
-          <a:p>
-            <a:pPr algn="l">
-              <a:lnSpc>
-                <a:spcPct val="120000"/>
-              </a:lnSpc>
-              <a:defRPr sz="1500" b="0" i="0">
-                <a:solidFill>
-                  <a:srgbClr val="6D8470"/>
-                </a:solidFill>
-                <a:latin typeface="Arimo"/>
-              </a:defRPr>
-            </a:pPr>
-            <a:r>
-              <a:rPr sz="1500" b="0" i="0">
-                <a:solidFill>
-                  <a:srgbClr val="6D8470"/>
-                </a:solidFill>
-                <a:latin typeface="Arimo"/>
-              </a:rPr>
-              <a:t>Особенности влияния уровня pH формулы на чувствительность кожи</a:t>
-            </a:r>
-          </a:p>
-        </p:txBody>
-      </p:sp>
-      <p:sp>
-        <p:nvSpPr>
-          <p:cNvPr id="6" name="Rounded Rectangle 5"/>
+          <p:cNvPr id="4" name="Rectangle 3"/>
           <p:cNvSpPr/>
           <p:nvPr/>
         </p:nvSpPr>
         <p:spPr>
           <a:xfrm>
-            <a:off x="357187" y="1339453"/>
-            <a:ext cx="8430768" cy="2496312"/>
-          </a:xfrm>
-          <a:prstGeom prst="roundRect">
+            <a:off x="357187" y="4732734"/>
+            <a:ext cx="8429625" cy="8929"/>
+          </a:xfrm>
+          <a:prstGeom prst="rect">
             <a:avLst/>
           </a:prstGeom>
           <a:solidFill>
-            <a:srgbClr val="E6D2CA"/>
+            <a:srgbClr val="D7E0CE"/>
           </a:solidFill>
-          <a:ln w="25400">
-            <a:solidFill>
-              <a:srgbClr val="9E6A5A"/>
-            </a:solidFill>
+          <a:ln>
+            <a:noFill/>
           </a:ln>
         </p:spPr>
         <p:style>
@@ -4835,9 +5262,258 @@
           </a:p>
         </p:txBody>
       </p:sp>
+      <p:pic>
+        <p:nvPicPr>
+          <p:cNvPr id="5" name="Picture 4" descr="mark_6D8470.png"/>
+          <p:cNvPicPr>
+            <a:picLocks noChangeAspect="1"/>
+          </p:cNvPicPr>
+          <p:nvPr/>
+        </p:nvPicPr>
+        <p:blipFill>
+          <a:blip r:embed="rId2"/>
+          <a:stretch>
+            <a:fillRect/>
+          </a:stretch>
+        </p:blipFill>
+        <p:spPr>
+          <a:xfrm>
+            <a:off x="357187" y="4848820"/>
+            <a:ext cx="178593" cy="178593"/>
+          </a:xfrm>
+          <a:prstGeom prst="rect">
+            <a:avLst/>
+          </a:prstGeom>
+        </p:spPr>
+      </p:pic>
+      <p:sp>
+        <p:nvSpPr>
+          <p:cNvPr id="6" name="TextBox 5"/>
+          <p:cNvSpPr txBox="1"/>
+          <p:nvPr/>
+        </p:nvSpPr>
+        <p:spPr>
+          <a:xfrm>
+            <a:off x="607218" y="4830960"/>
+            <a:ext cx="1785937" cy="178593"/>
+          </a:xfrm>
+          <a:prstGeom prst="rect">
+            <a:avLst/>
+          </a:prstGeom>
+          <a:noFill/>
+        </p:spPr>
+        <p:txBody>
+          <a:bodyPr wrap="square" tIns="0" bIns="0" lIns="0" rIns="0">
+            <a:spAutoFit/>
+          </a:bodyPr>
+          <a:lstStyle/>
+          <a:p>
+            <a:pPr algn="l">
+              <a:lnSpc>
+                <a:spcPct val="120000"/>
+              </a:lnSpc>
+              <a:defRPr sz="1100" b="1" i="0">
+                <a:solidFill>
+                  <a:srgbClr val="3D4A40"/>
+                </a:solidFill>
+                <a:latin typeface="Arimo"/>
+              </a:defRPr>
+            </a:pPr>
+            <a:r>
+              <a:rPr sz="1100" b="1" i="0">
+                <a:solidFill>
+                  <a:srgbClr val="3D4A40"/>
+                </a:solidFill>
+                <a:latin typeface="Arimo"/>
+              </a:rPr>
+              <a:t>YM PROSKIN</a:t>
+            </a:r>
+          </a:p>
+        </p:txBody>
+      </p:sp>
       <p:sp>
         <p:nvSpPr>
           <p:cNvPr id="7" name="TextBox 6"/>
+          <p:cNvSpPr txBox="1"/>
+          <p:nvPr/>
+        </p:nvSpPr>
+        <p:spPr>
+          <a:xfrm>
+            <a:off x="8251031" y="4830960"/>
+            <a:ext cx="535781" cy="178593"/>
+          </a:xfrm>
+          <a:prstGeom prst="rect">
+            <a:avLst/>
+          </a:prstGeom>
+          <a:noFill/>
+        </p:spPr>
+        <p:txBody>
+          <a:bodyPr wrap="square" tIns="0" bIns="0" lIns="0" rIns="0">
+            <a:spAutoFit/>
+          </a:bodyPr>
+          <a:lstStyle/>
+          <a:p>
+            <a:pPr algn="r">
+              <a:lnSpc>
+                <a:spcPct val="120000"/>
+              </a:lnSpc>
+              <a:defRPr sz="1100" b="0" i="0">
+                <a:solidFill>
+                  <a:srgbClr val="6D8470"/>
+                </a:solidFill>
+                <a:latin typeface="Arimo"/>
+              </a:defRPr>
+            </a:pPr>
+            <a:r>
+              <a:rPr sz="1100" b="0" i="0">
+                <a:solidFill>
+                  <a:srgbClr val="6D8470"/>
+                </a:solidFill>
+                <a:latin typeface="Arimo"/>
+              </a:rPr>
+              <a:t>6</a:t>
+            </a:r>
+          </a:p>
+        </p:txBody>
+      </p:sp>
+      <p:sp>
+        <p:nvSpPr>
+          <p:cNvPr id="8" name="TextBox 7"/>
+          <p:cNvSpPr txBox="1"/>
+          <p:nvPr/>
+        </p:nvSpPr>
+        <p:spPr>
+          <a:xfrm>
+            <a:off x="357187" y="357187"/>
+            <a:ext cx="8429625" cy="401835"/>
+          </a:xfrm>
+          <a:prstGeom prst="rect">
+            <a:avLst/>
+          </a:prstGeom>
+          <a:noFill/>
+        </p:spPr>
+        <p:txBody>
+          <a:bodyPr wrap="square" tIns="0" bIns="0" lIns="0" rIns="0">
+            <a:spAutoFit/>
+          </a:bodyPr>
+          <a:lstStyle/>
+          <a:p>
+            <a:pPr algn="l">
+              <a:lnSpc>
+                <a:spcPct val="120000"/>
+              </a:lnSpc>
+              <a:defRPr sz="2600" b="1" i="0">
+                <a:solidFill>
+                  <a:srgbClr val="2C3440"/>
+                </a:solidFill>
+                <a:latin typeface="Arimo"/>
+              </a:defRPr>
+            </a:pPr>
+            <a:r>
+              <a:rPr sz="2600" b="1" i="0">
+                <a:solidFill>
+                  <a:srgbClr val="2C3440"/>
+                </a:solidFill>
+                <a:latin typeface="Arimo"/>
+              </a:rPr>
+              <a:t>Местная Переносимость</a:t>
+            </a:r>
+          </a:p>
+        </p:txBody>
+      </p:sp>
+      <p:sp>
+        <p:nvSpPr>
+          <p:cNvPr id="9" name="TextBox 8"/>
+          <p:cNvSpPr txBox="1"/>
+          <p:nvPr/>
+        </p:nvSpPr>
+        <p:spPr>
+          <a:xfrm>
+            <a:off x="357187" y="803671"/>
+            <a:ext cx="8429625" cy="267890"/>
+          </a:xfrm>
+          <a:prstGeom prst="rect">
+            <a:avLst/>
+          </a:prstGeom>
+          <a:noFill/>
+        </p:spPr>
+        <p:txBody>
+          <a:bodyPr wrap="square" tIns="0" bIns="0" lIns="0" rIns="0">
+            <a:spAutoFit/>
+          </a:bodyPr>
+          <a:lstStyle/>
+          <a:p>
+            <a:pPr algn="l">
+              <a:lnSpc>
+                <a:spcPct val="120000"/>
+              </a:lnSpc>
+              <a:defRPr sz="1500" b="0" i="0">
+                <a:solidFill>
+                  <a:srgbClr val="6D8470"/>
+                </a:solidFill>
+                <a:latin typeface="Arimo"/>
+              </a:defRPr>
+            </a:pPr>
+            <a:r>
+              <a:rPr sz="1500" b="0" i="0">
+                <a:solidFill>
+                  <a:srgbClr val="6D8470"/>
+                </a:solidFill>
+                <a:latin typeface="Arimo"/>
+              </a:rPr>
+              <a:t>Особенности влияния уровня pH формулы на чувствительность кожи</a:t>
+            </a:r>
+          </a:p>
+        </p:txBody>
+      </p:sp>
+      <p:sp>
+        <p:nvSpPr>
+          <p:cNvPr id="10" name="Rounded Rectangle 9"/>
+          <p:cNvSpPr/>
+          <p:nvPr/>
+        </p:nvSpPr>
+        <p:spPr>
+          <a:xfrm>
+            <a:off x="357187" y="1339453"/>
+            <a:ext cx="8430768" cy="2496312"/>
+          </a:xfrm>
+          <a:prstGeom prst="roundRect">
+            <a:avLst/>
+          </a:prstGeom>
+          <a:solidFill>
+            <a:srgbClr val="E6D2CA"/>
+          </a:solidFill>
+          <a:ln w="25400">
+            <a:solidFill>
+              <a:srgbClr val="9E6A5A"/>
+            </a:solidFill>
+          </a:ln>
+        </p:spPr>
+        <p:style>
+          <a:lnRef idx="1">
+            <a:schemeClr val="accent1"/>
+          </a:lnRef>
+          <a:fillRef idx="3">
+            <a:schemeClr val="accent1"/>
+          </a:fillRef>
+          <a:effectRef idx="2">
+            <a:schemeClr val="accent1"/>
+          </a:effectRef>
+          <a:fontRef idx="minor">
+            <a:schemeClr val="lt1"/>
+          </a:fontRef>
+        </p:style>
+        <p:txBody>
+          <a:bodyPr rtlCol="0" anchor="ctr"/>
+          <a:lstStyle/>
+          <a:p>
+            <a:pPr algn="ctr"/>
+          </a:p>
+        </p:txBody>
+      </p:sp>
+      <p:sp>
+        <p:nvSpPr>
+          <p:cNvPr id="11" name="TextBox 10"/>
           <p:cNvSpPr txBox="1"/>
           <p:nvPr/>
         </p:nvSpPr>
@@ -4882,7 +5558,7 @@
       </p:sp>
       <p:sp>
         <p:nvSpPr>
-          <p:cNvPr id="8" name="TextBox 7"/>
+          <p:cNvPr id="12" name="TextBox 11"/>
           <p:cNvSpPr txBox="1"/>
           <p:nvPr/>
         </p:nvSpPr>
@@ -4927,7 +5603,7 @@
       </p:sp>
       <p:sp>
         <p:nvSpPr>
-          <p:cNvPr id="9" name="TextBox 8"/>
+          <p:cNvPr id="13" name="TextBox 12"/>
           <p:cNvSpPr txBox="1"/>
           <p:nvPr/>
         </p:nvSpPr>
@@ -5004,7 +5680,7 @@
         </p:nvSpPr>
         <p:spPr>
           <a:xfrm>
-            <a:off x="357187" y="4643437"/>
+            <a:off x="357187" y="4464843"/>
             <a:ext cx="4572000" cy="274320"/>
           </a:xfrm>
           <a:prstGeom prst="rect">
@@ -5049,7 +5725,7 @@
         </p:nvSpPr>
         <p:spPr>
           <a:xfrm>
-            <a:off x="5029200" y="4643437"/>
+            <a:off x="5029200" y="4464843"/>
             <a:ext cx="3749039" cy="274320"/>
           </a:xfrm>
           <a:prstGeom prst="rect">
@@ -5088,115 +5764,23 @@
       </p:sp>
       <p:sp>
         <p:nvSpPr>
-          <p:cNvPr id="4" name="TextBox 3"/>
-          <p:cNvSpPr txBox="1"/>
-          <p:nvPr/>
-        </p:nvSpPr>
-        <p:spPr>
-          <a:xfrm>
-            <a:off x="357187" y="357187"/>
-            <a:ext cx="8429625" cy="401835"/>
-          </a:xfrm>
-          <a:prstGeom prst="rect">
-            <a:avLst/>
-          </a:prstGeom>
-          <a:noFill/>
-        </p:spPr>
-        <p:txBody>
-          <a:bodyPr wrap="square" tIns="0" bIns="0" lIns="0" rIns="0">
-            <a:spAutoFit/>
-          </a:bodyPr>
-          <a:lstStyle/>
-          <a:p>
-            <a:pPr algn="l">
-              <a:lnSpc>
-                <a:spcPct val="120000"/>
-              </a:lnSpc>
-              <a:defRPr sz="2600" b="1" i="0">
-                <a:solidFill>
-                  <a:srgbClr val="2C3440"/>
-                </a:solidFill>
-                <a:latin typeface="Arimo"/>
-              </a:defRPr>
-            </a:pPr>
-            <a:r>
-              <a:rPr sz="2600" b="1" i="0">
-                <a:solidFill>
-                  <a:srgbClr val="2C3440"/>
-                </a:solidFill>
-                <a:latin typeface="Arimo"/>
-              </a:rPr>
-              <a:t>Терапевтические выводы</a:t>
-            </a:r>
-          </a:p>
-        </p:txBody>
-      </p:sp>
-      <p:sp>
-        <p:nvSpPr>
-          <p:cNvPr id="5" name="TextBox 4"/>
-          <p:cNvSpPr txBox="1"/>
-          <p:nvPr/>
-        </p:nvSpPr>
-        <p:spPr>
-          <a:xfrm>
-            <a:off x="357187" y="803671"/>
-            <a:ext cx="8429625" cy="267890"/>
-          </a:xfrm>
-          <a:prstGeom prst="rect">
-            <a:avLst/>
-          </a:prstGeom>
-          <a:noFill/>
-        </p:spPr>
-        <p:txBody>
-          <a:bodyPr wrap="square" tIns="0" bIns="0" lIns="0" rIns="0">
-            <a:spAutoFit/>
-          </a:bodyPr>
-          <a:lstStyle/>
-          <a:p>
-            <a:pPr algn="l">
-              <a:lnSpc>
-                <a:spcPct val="120000"/>
-              </a:lnSpc>
-              <a:defRPr sz="1500" b="0" i="0">
-                <a:solidFill>
-                  <a:srgbClr val="6D8470"/>
-                </a:solidFill>
-                <a:latin typeface="Arimo"/>
-              </a:defRPr>
-            </a:pPr>
-            <a:r>
-              <a:rPr sz="1500" b="0" i="0">
-                <a:solidFill>
-                  <a:srgbClr val="6D8470"/>
-                </a:solidFill>
-                <a:latin typeface="Arimo"/>
-              </a:rPr>
-              <a:t>Резюме по клиническому применению витамина C</a:t>
-            </a:r>
-          </a:p>
-        </p:txBody>
-      </p:sp>
-      <p:sp>
-        <p:nvSpPr>
-          <p:cNvPr id="6" name="Rounded Rectangle 5"/>
+          <p:cNvPr id="4" name="Rectangle 3"/>
           <p:cNvSpPr/>
           <p:nvPr/>
         </p:nvSpPr>
         <p:spPr>
           <a:xfrm>
-            <a:off x="357187" y="1303734"/>
-            <a:ext cx="8430768" cy="2857500"/>
-          </a:xfrm>
-          <a:prstGeom prst="roundRect">
+            <a:off x="357187" y="4732734"/>
+            <a:ext cx="8429625" cy="8929"/>
+          </a:xfrm>
+          <a:prstGeom prst="rect">
             <a:avLst/>
           </a:prstGeom>
           <a:solidFill>
-            <a:srgbClr val="E6D2CA"/>
+            <a:srgbClr val="D7E0CE"/>
           </a:solidFill>
-          <a:ln w="12700">
-            <a:solidFill>
-              <a:srgbClr val="D7E0CE"/>
-            </a:solidFill>
+          <a:ln>
+            <a:noFill/>
           </a:ln>
         </p:spPr>
         <p:style>
@@ -5221,6 +5805,75 @@
           </a:p>
         </p:txBody>
       </p:sp>
+      <p:pic>
+        <p:nvPicPr>
+          <p:cNvPr id="5" name="Picture 4" descr="mark_6D8470.png"/>
+          <p:cNvPicPr>
+            <a:picLocks noChangeAspect="1"/>
+          </p:cNvPicPr>
+          <p:nvPr/>
+        </p:nvPicPr>
+        <p:blipFill>
+          <a:blip r:embed="rId2"/>
+          <a:stretch>
+            <a:fillRect/>
+          </a:stretch>
+        </p:blipFill>
+        <p:spPr>
+          <a:xfrm>
+            <a:off x="357187" y="4848820"/>
+            <a:ext cx="178593" cy="178593"/>
+          </a:xfrm>
+          <a:prstGeom prst="rect">
+            <a:avLst/>
+          </a:prstGeom>
+        </p:spPr>
+      </p:pic>
+      <p:sp>
+        <p:nvSpPr>
+          <p:cNvPr id="6" name="TextBox 5"/>
+          <p:cNvSpPr txBox="1"/>
+          <p:nvPr/>
+        </p:nvSpPr>
+        <p:spPr>
+          <a:xfrm>
+            <a:off x="607218" y="4830960"/>
+            <a:ext cx="1785937" cy="178593"/>
+          </a:xfrm>
+          <a:prstGeom prst="rect">
+            <a:avLst/>
+          </a:prstGeom>
+          <a:noFill/>
+        </p:spPr>
+        <p:txBody>
+          <a:bodyPr wrap="square" tIns="0" bIns="0" lIns="0" rIns="0">
+            <a:spAutoFit/>
+          </a:bodyPr>
+          <a:lstStyle/>
+          <a:p>
+            <a:pPr algn="l">
+              <a:lnSpc>
+                <a:spcPct val="120000"/>
+              </a:lnSpc>
+              <a:defRPr sz="1100" b="1" i="0">
+                <a:solidFill>
+                  <a:srgbClr val="3D4A40"/>
+                </a:solidFill>
+                <a:latin typeface="Arimo"/>
+              </a:defRPr>
+            </a:pPr>
+            <a:r>
+              <a:rPr sz="1100" b="1" i="0">
+                <a:solidFill>
+                  <a:srgbClr val="3D4A40"/>
+                </a:solidFill>
+                <a:latin typeface="Arimo"/>
+              </a:rPr>
+              <a:t>YM PROSKIN</a:t>
+            </a:r>
+          </a:p>
+        </p:txBody>
+      </p:sp>
       <p:sp>
         <p:nvSpPr>
           <p:cNvPr id="7" name="TextBox 6"/>
@@ -5229,8 +5882,98 @@
         </p:nvSpPr>
         <p:spPr>
           <a:xfrm>
-            <a:off x="640080" y="1580554"/>
-            <a:ext cx="7863840" cy="2286000"/>
+            <a:off x="8251031" y="4830960"/>
+            <a:ext cx="535781" cy="178593"/>
+          </a:xfrm>
+          <a:prstGeom prst="rect">
+            <a:avLst/>
+          </a:prstGeom>
+          <a:noFill/>
+        </p:spPr>
+        <p:txBody>
+          <a:bodyPr wrap="square" tIns="0" bIns="0" lIns="0" rIns="0">
+            <a:spAutoFit/>
+          </a:bodyPr>
+          <a:lstStyle/>
+          <a:p>
+            <a:pPr algn="r">
+              <a:lnSpc>
+                <a:spcPct val="120000"/>
+              </a:lnSpc>
+              <a:defRPr sz="1100" b="0" i="0">
+                <a:solidFill>
+                  <a:srgbClr val="6D8470"/>
+                </a:solidFill>
+                <a:latin typeface="Arimo"/>
+              </a:defRPr>
+            </a:pPr>
+            <a:r>
+              <a:rPr sz="1100" b="0" i="0">
+                <a:solidFill>
+                  <a:srgbClr val="6D8470"/>
+                </a:solidFill>
+                <a:latin typeface="Arimo"/>
+              </a:rPr>
+              <a:t>7</a:t>
+            </a:r>
+          </a:p>
+        </p:txBody>
+      </p:sp>
+      <p:sp>
+        <p:nvSpPr>
+          <p:cNvPr id="8" name="TextBox 7"/>
+          <p:cNvSpPr txBox="1"/>
+          <p:nvPr/>
+        </p:nvSpPr>
+        <p:spPr>
+          <a:xfrm>
+            <a:off x="357187" y="357187"/>
+            <a:ext cx="8429625" cy="401835"/>
+          </a:xfrm>
+          <a:prstGeom prst="rect">
+            <a:avLst/>
+          </a:prstGeom>
+          <a:noFill/>
+        </p:spPr>
+        <p:txBody>
+          <a:bodyPr wrap="square" tIns="0" bIns="0" lIns="0" rIns="0">
+            <a:spAutoFit/>
+          </a:bodyPr>
+          <a:lstStyle/>
+          <a:p>
+            <a:pPr algn="l">
+              <a:lnSpc>
+                <a:spcPct val="120000"/>
+              </a:lnSpc>
+              <a:defRPr sz="2600" b="1" i="0">
+                <a:solidFill>
+                  <a:srgbClr val="2C3440"/>
+                </a:solidFill>
+                <a:latin typeface="Arimo"/>
+              </a:defRPr>
+            </a:pPr>
+            <a:r>
+              <a:rPr sz="2600" b="1" i="0">
+                <a:solidFill>
+                  <a:srgbClr val="2C3440"/>
+                </a:solidFill>
+                <a:latin typeface="Arimo"/>
+              </a:rPr>
+              <a:t>Терапевтические выводы</a:t>
+            </a:r>
+          </a:p>
+        </p:txBody>
+      </p:sp>
+      <p:sp>
+        <p:nvSpPr>
+          <p:cNvPr id="9" name="TextBox 8"/>
+          <p:cNvSpPr txBox="1"/>
+          <p:nvPr/>
+        </p:nvSpPr>
+        <p:spPr>
+          <a:xfrm>
+            <a:off x="357187" y="803671"/>
+            <a:ext cx="8429625" cy="267890"/>
           </a:xfrm>
           <a:prstGeom prst="rect">
             <a:avLst/>
@@ -5249,7 +5992,7 @@
               </a:lnSpc>
               <a:defRPr sz="1500" b="0" i="0">
                 <a:solidFill>
-                  <a:srgbClr val="3D4A40"/>
+                  <a:srgbClr val="6D8470"/>
                 </a:solidFill>
                 <a:latin typeface="Arimo"/>
               </a:defRPr>
@@ -5257,13 +6000,81 @@
             <a:r>
               <a:rPr sz="1500" b="0" i="0">
                 <a:solidFill>
-                  <a:srgbClr val="3D4A40"/>
+                  <a:srgbClr val="6D8470"/>
                 </a:solidFill>
                 <a:latin typeface="Arimo"/>
               </a:rPr>
-              <a:t>• L-аскорбиновая кислота — золотой стандарт для фотозащиты и активации синтеза коллагена I и III типов.</a:t>
-            </a:r>
-          </a:p>
+              <a:t>Резюме по клиническому применению витамина C</a:t>
+            </a:r>
+          </a:p>
+        </p:txBody>
+      </p:sp>
+      <p:sp>
+        <p:nvSpPr>
+          <p:cNvPr id="10" name="Rounded Rectangle 9"/>
+          <p:cNvSpPr/>
+          <p:nvPr/>
+        </p:nvSpPr>
+        <p:spPr>
+          <a:xfrm>
+            <a:off x="357187" y="1303734"/>
+            <a:ext cx="8430768" cy="2857500"/>
+          </a:xfrm>
+          <a:prstGeom prst="roundRect">
+            <a:avLst/>
+          </a:prstGeom>
+          <a:solidFill>
+            <a:srgbClr val="E6D2CA"/>
+          </a:solidFill>
+          <a:ln w="12700">
+            <a:solidFill>
+              <a:srgbClr val="D7E0CE"/>
+            </a:solidFill>
+          </a:ln>
+        </p:spPr>
+        <p:style>
+          <a:lnRef idx="1">
+            <a:schemeClr val="accent1"/>
+          </a:lnRef>
+          <a:fillRef idx="3">
+            <a:schemeClr val="accent1"/>
+          </a:fillRef>
+          <a:effectRef idx="2">
+            <a:schemeClr val="accent1"/>
+          </a:effectRef>
+          <a:fontRef idx="minor">
+            <a:schemeClr val="lt1"/>
+          </a:fontRef>
+        </p:style>
+        <p:txBody>
+          <a:bodyPr rtlCol="0" anchor="ctr"/>
+          <a:lstStyle/>
+          <a:p>
+            <a:pPr algn="ctr"/>
+          </a:p>
+        </p:txBody>
+      </p:sp>
+      <p:sp>
+        <p:nvSpPr>
+          <p:cNvPr id="11" name="TextBox 10"/>
+          <p:cNvSpPr txBox="1"/>
+          <p:nvPr/>
+        </p:nvSpPr>
+        <p:spPr>
+          <a:xfrm>
+            <a:off x="640080" y="1580554"/>
+            <a:ext cx="7863840" cy="2286000"/>
+          </a:xfrm>
+          <a:prstGeom prst="rect">
+            <a:avLst/>
+          </a:prstGeom>
+          <a:noFill/>
+        </p:spPr>
+        <p:txBody>
+          <a:bodyPr wrap="square" tIns="0" bIns="0" lIns="0" rIns="0">
+            <a:spAutoFit/>
+          </a:bodyPr>
+          <a:lstStyle/>
           <a:p>
             <a:pPr algn="l">
               <a:lnSpc>
@@ -5276,6 +6087,15 @@
                 <a:latin typeface="Arimo"/>
               </a:defRPr>
             </a:pPr>
+            <a:r>
+              <a:rPr sz="1500" b="0" i="0">
+                <a:solidFill>
+                  <a:srgbClr val="3D4A40"/>
+                </a:solidFill>
+                <a:latin typeface="Arimo"/>
+              </a:rPr>
+              <a:t>• L-аскорбиновая кислота — золотой стандарт для фотозащиты и активации синтеза коллагена I и III типов.</a:t>
+            </a:r>
           </a:p>
           <a:p>
             <a:pPr algn="l">
@@ -5289,15 +6109,6 @@
                 <a:latin typeface="Arimo"/>
               </a:defRPr>
             </a:pPr>
-            <a:r>
-              <a:rPr sz="1500" b="0" i="0">
-                <a:solidFill>
-                  <a:srgbClr val="3D4A40"/>
-                </a:solidFill>
-                <a:latin typeface="Arimo"/>
-              </a:rPr>
-              <a:t>• Трансдермальный перенос L-аскорбиновой кислоты требует pH &lt; 3.5 и ограничен концентрацией в 20%.</a:t>
-            </a:r>
           </a:p>
           <a:p>
             <a:pPr algn="l">
@@ -5311,6 +6122,15 @@
                 <a:latin typeface="Arimo"/>
               </a:defRPr>
             </a:pPr>
+            <a:r>
+              <a:rPr sz="1500" b="0" i="0">
+                <a:solidFill>
+                  <a:srgbClr val="3D4A40"/>
+                </a:solidFill>
+                <a:latin typeface="Arimo"/>
+              </a:rPr>
+              <a:t>• Трансдермальный перенос L-аскорбиновой кислоты требует pH &lt; 3.5 и ограничен концентрацией в 20%.</a:t>
+            </a:r>
           </a:p>
           <a:p>
             <a:pPr algn="l">
@@ -5324,6 +6144,19 @@
                 <a:latin typeface="Arimo"/>
               </a:defRPr>
             </a:pPr>
+          </a:p>
+          <a:p>
+            <a:pPr algn="l">
+              <a:lnSpc>
+                <a:spcPct val="120000"/>
+              </a:lnSpc>
+              <a:defRPr sz="1500" b="0" i="0">
+                <a:solidFill>
+                  <a:srgbClr val="3D4A40"/>
+                </a:solidFill>
+                <a:latin typeface="Arimo"/>
+              </a:defRPr>
+            </a:pPr>
             <a:r>
               <a:rPr sz="1500" b="0" i="0">
                 <a:solidFill>
@@ -5336,6 +6169,30 @@
           </a:p>
         </p:txBody>
       </p:sp>
+      <p:pic>
+        <p:nvPicPr>
+          <p:cNvPr id="12" name="Picture 11" descr="badge_2C3440.png"/>
+          <p:cNvPicPr>
+            <a:picLocks noChangeAspect="1"/>
+          </p:cNvPicPr>
+          <p:nvPr/>
+        </p:nvPicPr>
+        <p:blipFill>
+          <a:blip r:embed="rId3"/>
+          <a:stretch>
+            <a:fillRect/>
+          </a:stretch>
+        </p:blipFill>
+        <p:spPr>
+          <a:xfrm>
+            <a:off x="3750468" y="1750218"/>
+            <a:ext cx="1643062" cy="1643062"/>
+          </a:xfrm>
+          <a:prstGeom prst="rect">
+            <a:avLst/>
+          </a:prstGeom>
+        </p:spPr>
+      </p:pic>
     </p:spTree>
   </p:cSld>
   <p:clrMapOvr>
